--- a/Soutenance_RE_Sources_NEW.pptx
+++ b/Soutenance_RE_Sources_NEW.pptx
@@ -5,22 +5,22 @@
     <p:sldMasterId id="2147483648" r:id="rId1"/>
   </p:sldMasterIdLst>
   <p:sldIdLst>
-    <p:sldId id="256" r:id="rId7"/>
-    <p:sldId id="257" r:id="rId8"/>
-    <p:sldId id="258" r:id="rId9"/>
-    <p:sldId id="259" r:id="rId10"/>
-    <p:sldId id="260" r:id="rId11"/>
-    <p:sldId id="261" r:id="rId12"/>
-    <p:sldId id="262" r:id="rId13"/>
-    <p:sldId id="263" r:id="rId14"/>
-    <p:sldId id="264" r:id="rId15"/>
-    <p:sldId id="265" r:id="rId16"/>
-    <p:sldId id="266" r:id="rId17"/>
-    <p:sldId id="267" r:id="rId18"/>
-    <p:sldId id="268" r:id="rId19"/>
-    <p:sldId id="269" r:id="rId20"/>
+    <p:sldId id="256" r:id="rId2"/>
+    <p:sldId id="257" r:id="rId3"/>
+    <p:sldId id="258" r:id="rId4"/>
+    <p:sldId id="259" r:id="rId5"/>
+    <p:sldId id="260" r:id="rId6"/>
+    <p:sldId id="261" r:id="rId7"/>
+    <p:sldId id="262" r:id="rId8"/>
+    <p:sldId id="263" r:id="rId9"/>
+    <p:sldId id="264" r:id="rId10"/>
+    <p:sldId id="265" r:id="rId11"/>
+    <p:sldId id="266" r:id="rId12"/>
+    <p:sldId id="267" r:id="rId13"/>
+    <p:sldId id="268" r:id="rId14"/>
+    <p:sldId id="269" r:id="rId15"/>
   </p:sldIdLst>
-  <p:sldSz cx="12191695" cy="6858000" type="screen4x3"/>
+  <p:sldSz cx="12192000" cy="6858000"/>
   <p:notesSz cx="6858000" cy="9144000"/>
   <p:defaultTextStyle>
     <a:defPPr>
@@ -117,6 +117,22 @@
       </a:defRPr>
     </a:lvl9pPr>
   </p:defaultTextStyle>
+  <p:extLst>
+    <p:ext uri="{EFAFB233-063F-42B5-8137-9DF3F51BA10A}">
+      <p15:sldGuideLst xmlns:p15="http://schemas.microsoft.com/office/powerpoint/2012/main">
+        <p15:guide id="1" orient="horz" pos="2160">
+          <p15:clr>
+            <a:srgbClr val="A4A3A4"/>
+          </p15:clr>
+        </p15:guide>
+        <p15:guide id="2" pos="2880">
+          <p15:clr>
+            <a:srgbClr val="A4A3A4"/>
+          </p15:clr>
+        </p15:guide>
+      </p15:sldGuideLst>
+    </p:ext>
+  </p:extLst>
 </p:presentation>
 </file>
 
@@ -158,10 +174,9 @@
           <a:lstStyle/>
           <a:p>
             <a:r>
-              <a:rPr lang="en-US" smtClean="0"/>
+              <a:rPr lang="en-US"/>
               <a:t>Click to edit Master title style</a:t>
             </a:r>
-            <a:endParaRPr lang="en-US"/>
           </a:p>
         </p:txBody>
       </p:sp>
@@ -277,10 +292,9 @@
           </a:lstStyle>
           <a:p>
             <a:r>
-              <a:rPr lang="en-US" smtClean="0"/>
+              <a:rPr lang="en-US"/>
               <a:t>Click to edit Master subtitle style</a:t>
             </a:r>
-            <a:endParaRPr lang="en-US"/>
           </a:p>
         </p:txBody>
       </p:sp>
@@ -301,7 +315,7 @@
           <a:p>
             <a:fld id="{5BCAD085-E8A6-8845-BD4E-CB4CCA059FC4}" type="datetimeFigureOut">
               <a:rPr lang="en-US" smtClean="0"/>
-              <a:t>1/27/13</a:t>
+              <a:t>4/13/2026</a:t>
             </a:fld>
             <a:endParaRPr lang="en-US"/>
           </a:p>
@@ -343,7 +357,7 @@
           <a:p>
             <a:fld id="{C1FF6DA9-008F-8B48-92A6-B652298478BF}" type="slidenum">
               <a:rPr lang="en-US" smtClean="0"/>
-              <a:t>‹#›</a:t>
+              <a:t>‹N°›</a:t>
             </a:fld>
             <a:endParaRPr lang="en-US"/>
           </a:p>
@@ -395,10 +409,9 @@
           <a:lstStyle/>
           <a:p>
             <a:r>
-              <a:rPr lang="en-US" smtClean="0"/>
+              <a:rPr lang="en-US"/>
               <a:t>Click to edit Master title style</a:t>
             </a:r>
-            <a:endParaRPr lang="en-US"/>
           </a:p>
         </p:txBody>
       </p:sp>
@@ -419,38 +432,37 @@
           <a:p>
             <a:pPr lvl="0"/>
             <a:r>
-              <a:rPr lang="en-US" smtClean="0"/>
+              <a:rPr lang="en-US"/>
               <a:t>Click to edit Master text styles</a:t>
             </a:r>
           </a:p>
           <a:p>
             <a:pPr lvl="1"/>
             <a:r>
-              <a:rPr lang="en-US" smtClean="0"/>
+              <a:rPr lang="en-US"/>
               <a:t>Second level</a:t>
             </a:r>
           </a:p>
           <a:p>
             <a:pPr lvl="2"/>
             <a:r>
-              <a:rPr lang="en-US" smtClean="0"/>
+              <a:rPr lang="en-US"/>
               <a:t>Third level</a:t>
             </a:r>
           </a:p>
           <a:p>
             <a:pPr lvl="3"/>
             <a:r>
-              <a:rPr lang="en-US" smtClean="0"/>
+              <a:rPr lang="en-US"/>
               <a:t>Fourth level</a:t>
             </a:r>
           </a:p>
           <a:p>
             <a:pPr lvl="4"/>
             <a:r>
-              <a:rPr lang="en-US" smtClean="0"/>
+              <a:rPr lang="en-US"/>
               <a:t>Fifth level</a:t>
             </a:r>
-            <a:endParaRPr lang="en-US"/>
           </a:p>
         </p:txBody>
       </p:sp>
@@ -471,7 +483,7 @@
           <a:p>
             <a:fld id="{5BCAD085-E8A6-8845-BD4E-CB4CCA059FC4}" type="datetimeFigureOut">
               <a:rPr lang="en-US" smtClean="0"/>
-              <a:t>1/27/13</a:t>
+              <a:t>4/13/2026</a:t>
             </a:fld>
             <a:endParaRPr lang="en-US"/>
           </a:p>
@@ -513,7 +525,7 @@
           <a:p>
             <a:fld id="{C1FF6DA9-008F-8B48-92A6-B652298478BF}" type="slidenum">
               <a:rPr lang="en-US" smtClean="0"/>
-              <a:t>‹#›</a:t>
+              <a:t>‹N°›</a:t>
             </a:fld>
             <a:endParaRPr lang="en-US"/>
           </a:p>
@@ -570,10 +582,9 @@
           <a:lstStyle/>
           <a:p>
             <a:r>
-              <a:rPr lang="en-US" smtClean="0"/>
+              <a:rPr lang="en-US"/>
               <a:t>Click to edit Master title style</a:t>
             </a:r>
-            <a:endParaRPr lang="en-US"/>
           </a:p>
         </p:txBody>
       </p:sp>
@@ -599,38 +610,37 @@
           <a:p>
             <a:pPr lvl="0"/>
             <a:r>
-              <a:rPr lang="en-US" smtClean="0"/>
+              <a:rPr lang="en-US"/>
               <a:t>Click to edit Master text styles</a:t>
             </a:r>
           </a:p>
           <a:p>
             <a:pPr lvl="1"/>
             <a:r>
-              <a:rPr lang="en-US" smtClean="0"/>
+              <a:rPr lang="en-US"/>
               <a:t>Second level</a:t>
             </a:r>
           </a:p>
           <a:p>
             <a:pPr lvl="2"/>
             <a:r>
-              <a:rPr lang="en-US" smtClean="0"/>
+              <a:rPr lang="en-US"/>
               <a:t>Third level</a:t>
             </a:r>
           </a:p>
           <a:p>
             <a:pPr lvl="3"/>
             <a:r>
-              <a:rPr lang="en-US" smtClean="0"/>
+              <a:rPr lang="en-US"/>
               <a:t>Fourth level</a:t>
             </a:r>
           </a:p>
           <a:p>
             <a:pPr lvl="4"/>
             <a:r>
-              <a:rPr lang="en-US" smtClean="0"/>
+              <a:rPr lang="en-US"/>
               <a:t>Fifth level</a:t>
             </a:r>
-            <a:endParaRPr lang="en-US"/>
           </a:p>
         </p:txBody>
       </p:sp>
@@ -651,7 +661,7 @@
           <a:p>
             <a:fld id="{5BCAD085-E8A6-8845-BD4E-CB4CCA059FC4}" type="datetimeFigureOut">
               <a:rPr lang="en-US" smtClean="0"/>
-              <a:t>1/27/13</a:t>
+              <a:t>4/13/2026</a:t>
             </a:fld>
             <a:endParaRPr lang="en-US"/>
           </a:p>
@@ -693,7 +703,7 @@
           <a:p>
             <a:fld id="{C1FF6DA9-008F-8B48-92A6-B652298478BF}" type="slidenum">
               <a:rPr lang="en-US" smtClean="0"/>
-              <a:t>‹#›</a:t>
+              <a:t>‹N°›</a:t>
             </a:fld>
             <a:endParaRPr lang="en-US"/>
           </a:p>
@@ -745,10 +755,9 @@
           <a:lstStyle/>
           <a:p>
             <a:r>
-              <a:rPr lang="en-US" smtClean="0"/>
+              <a:rPr lang="en-US"/>
               <a:t>Click to edit Master title style</a:t>
             </a:r>
-            <a:endParaRPr lang="en-US"/>
           </a:p>
         </p:txBody>
       </p:sp>
@@ -769,38 +778,37 @@
           <a:p>
             <a:pPr lvl="0"/>
             <a:r>
-              <a:rPr lang="en-US" smtClean="0"/>
+              <a:rPr lang="en-US"/>
               <a:t>Click to edit Master text styles</a:t>
             </a:r>
           </a:p>
           <a:p>
             <a:pPr lvl="1"/>
             <a:r>
-              <a:rPr lang="en-US" smtClean="0"/>
+              <a:rPr lang="en-US"/>
               <a:t>Second level</a:t>
             </a:r>
           </a:p>
           <a:p>
             <a:pPr lvl="2"/>
             <a:r>
-              <a:rPr lang="en-US" smtClean="0"/>
+              <a:rPr lang="en-US"/>
               <a:t>Third level</a:t>
             </a:r>
           </a:p>
           <a:p>
             <a:pPr lvl="3"/>
             <a:r>
-              <a:rPr lang="en-US" smtClean="0"/>
+              <a:rPr lang="en-US"/>
               <a:t>Fourth level</a:t>
             </a:r>
           </a:p>
           <a:p>
             <a:pPr lvl="4"/>
             <a:r>
-              <a:rPr lang="en-US" smtClean="0"/>
+              <a:rPr lang="en-US"/>
               <a:t>Fifth level</a:t>
             </a:r>
-            <a:endParaRPr lang="en-US"/>
           </a:p>
         </p:txBody>
       </p:sp>
@@ -821,7 +829,7 @@
           <a:p>
             <a:fld id="{5BCAD085-E8A6-8845-BD4E-CB4CCA059FC4}" type="datetimeFigureOut">
               <a:rPr lang="en-US" smtClean="0"/>
-              <a:t>1/27/13</a:t>
+              <a:t>4/13/2026</a:t>
             </a:fld>
             <a:endParaRPr lang="en-US"/>
           </a:p>
@@ -863,7 +871,7 @@
           <a:p>
             <a:fld id="{C1FF6DA9-008F-8B48-92A6-B652298478BF}" type="slidenum">
               <a:rPr lang="en-US" smtClean="0"/>
-              <a:t>‹#›</a:t>
+              <a:t>‹N°›</a:t>
             </a:fld>
             <a:endParaRPr lang="en-US"/>
           </a:p>
@@ -924,10 +932,9 @@
           </a:lstStyle>
           <a:p>
             <a:r>
-              <a:rPr lang="en-US" smtClean="0"/>
+              <a:rPr lang="en-US"/>
               <a:t>Click to edit Master title style</a:t>
             </a:r>
-            <a:endParaRPr lang="en-US"/>
           </a:p>
         </p:txBody>
       </p:sp>
@@ -1044,7 +1051,7 @@
           <a:p>
             <a:pPr lvl="0"/>
             <a:r>
-              <a:rPr lang="en-US" smtClean="0"/>
+              <a:rPr lang="en-US"/>
               <a:t>Click to edit Master text styles</a:t>
             </a:r>
           </a:p>
@@ -1067,7 +1074,7 @@
           <a:p>
             <a:fld id="{5BCAD085-E8A6-8845-BD4E-CB4CCA059FC4}" type="datetimeFigureOut">
               <a:rPr lang="en-US" smtClean="0"/>
-              <a:t>1/27/13</a:t>
+              <a:t>4/13/2026</a:t>
             </a:fld>
             <a:endParaRPr lang="en-US"/>
           </a:p>
@@ -1109,7 +1116,7 @@
           <a:p>
             <a:fld id="{C1FF6DA9-008F-8B48-92A6-B652298478BF}" type="slidenum">
               <a:rPr lang="en-US" smtClean="0"/>
-              <a:t>‹#›</a:t>
+              <a:t>‹N°›</a:t>
             </a:fld>
             <a:endParaRPr lang="en-US"/>
           </a:p>
@@ -1161,10 +1168,9 @@
           <a:lstStyle/>
           <a:p>
             <a:r>
-              <a:rPr lang="en-US" smtClean="0"/>
+              <a:rPr lang="en-US"/>
               <a:t>Click to edit Master title style</a:t>
             </a:r>
-            <a:endParaRPr lang="en-US"/>
           </a:p>
         </p:txBody>
       </p:sp>
@@ -1218,38 +1224,37 @@
           <a:p>
             <a:pPr lvl="0"/>
             <a:r>
-              <a:rPr lang="en-US" smtClean="0"/>
+              <a:rPr lang="en-US"/>
               <a:t>Click to edit Master text styles</a:t>
             </a:r>
           </a:p>
           <a:p>
             <a:pPr lvl="1"/>
             <a:r>
-              <a:rPr lang="en-US" smtClean="0"/>
+              <a:rPr lang="en-US"/>
               <a:t>Second level</a:t>
             </a:r>
           </a:p>
           <a:p>
             <a:pPr lvl="2"/>
             <a:r>
-              <a:rPr lang="en-US" smtClean="0"/>
+              <a:rPr lang="en-US"/>
               <a:t>Third level</a:t>
             </a:r>
           </a:p>
           <a:p>
             <a:pPr lvl="3"/>
             <a:r>
-              <a:rPr lang="en-US" smtClean="0"/>
+              <a:rPr lang="en-US"/>
               <a:t>Fourth level</a:t>
             </a:r>
           </a:p>
           <a:p>
             <a:pPr lvl="4"/>
             <a:r>
-              <a:rPr lang="en-US" smtClean="0"/>
+              <a:rPr lang="en-US"/>
               <a:t>Fifth level</a:t>
             </a:r>
-            <a:endParaRPr lang="en-US"/>
           </a:p>
         </p:txBody>
       </p:sp>
@@ -1303,38 +1308,37 @@
           <a:p>
             <a:pPr lvl="0"/>
             <a:r>
-              <a:rPr lang="en-US" smtClean="0"/>
+              <a:rPr lang="en-US"/>
               <a:t>Click to edit Master text styles</a:t>
             </a:r>
           </a:p>
           <a:p>
             <a:pPr lvl="1"/>
             <a:r>
-              <a:rPr lang="en-US" smtClean="0"/>
+              <a:rPr lang="en-US"/>
               <a:t>Second level</a:t>
             </a:r>
           </a:p>
           <a:p>
             <a:pPr lvl="2"/>
             <a:r>
-              <a:rPr lang="en-US" smtClean="0"/>
+              <a:rPr lang="en-US"/>
               <a:t>Third level</a:t>
             </a:r>
           </a:p>
           <a:p>
             <a:pPr lvl="3"/>
             <a:r>
-              <a:rPr lang="en-US" smtClean="0"/>
+              <a:rPr lang="en-US"/>
               <a:t>Fourth level</a:t>
             </a:r>
           </a:p>
           <a:p>
             <a:pPr lvl="4"/>
             <a:r>
-              <a:rPr lang="en-US" smtClean="0"/>
+              <a:rPr lang="en-US"/>
               <a:t>Fifth level</a:t>
             </a:r>
-            <a:endParaRPr lang="en-US"/>
           </a:p>
         </p:txBody>
       </p:sp>
@@ -1355,7 +1359,7 @@
           <a:p>
             <a:fld id="{5BCAD085-E8A6-8845-BD4E-CB4CCA059FC4}" type="datetimeFigureOut">
               <a:rPr lang="en-US" smtClean="0"/>
-              <a:t>1/27/13</a:t>
+              <a:t>4/13/2026</a:t>
             </a:fld>
             <a:endParaRPr lang="en-US"/>
           </a:p>
@@ -1397,7 +1401,7 @@
           <a:p>
             <a:fld id="{C1FF6DA9-008F-8B48-92A6-B652298478BF}" type="slidenum">
               <a:rPr lang="en-US" smtClean="0"/>
-              <a:t>‹#›</a:t>
+              <a:t>‹N°›</a:t>
             </a:fld>
             <a:endParaRPr lang="en-US"/>
           </a:p>
@@ -1453,10 +1457,9 @@
           </a:lstStyle>
           <a:p>
             <a:r>
-              <a:rPr lang="en-US" smtClean="0"/>
+              <a:rPr lang="en-US"/>
               <a:t>Click to edit Master title style</a:t>
             </a:r>
-            <a:endParaRPr lang="en-US"/>
           </a:p>
         </p:txBody>
       </p:sp>
@@ -1519,7 +1522,7 @@
           <a:p>
             <a:pPr lvl="0"/>
             <a:r>
-              <a:rPr lang="en-US" smtClean="0"/>
+              <a:rPr lang="en-US"/>
               <a:t>Click to edit Master text styles</a:t>
             </a:r>
           </a:p>
@@ -1575,38 +1578,37 @@
           <a:p>
             <a:pPr lvl="0"/>
             <a:r>
-              <a:rPr lang="en-US" smtClean="0"/>
+              <a:rPr lang="en-US"/>
               <a:t>Click to edit Master text styles</a:t>
             </a:r>
           </a:p>
           <a:p>
             <a:pPr lvl="1"/>
             <a:r>
-              <a:rPr lang="en-US" smtClean="0"/>
+              <a:rPr lang="en-US"/>
               <a:t>Second level</a:t>
             </a:r>
           </a:p>
           <a:p>
             <a:pPr lvl="2"/>
             <a:r>
-              <a:rPr lang="en-US" smtClean="0"/>
+              <a:rPr lang="en-US"/>
               <a:t>Third level</a:t>
             </a:r>
           </a:p>
           <a:p>
             <a:pPr lvl="3"/>
             <a:r>
-              <a:rPr lang="en-US" smtClean="0"/>
+              <a:rPr lang="en-US"/>
               <a:t>Fourth level</a:t>
             </a:r>
           </a:p>
           <a:p>
             <a:pPr lvl="4"/>
             <a:r>
-              <a:rPr lang="en-US" smtClean="0"/>
+              <a:rPr lang="en-US"/>
               <a:t>Fifth level</a:t>
             </a:r>
-            <a:endParaRPr lang="en-US"/>
           </a:p>
         </p:txBody>
       </p:sp>
@@ -1669,7 +1671,7 @@
           <a:p>
             <a:pPr lvl="0"/>
             <a:r>
-              <a:rPr lang="en-US" smtClean="0"/>
+              <a:rPr lang="en-US"/>
               <a:t>Click to edit Master text styles</a:t>
             </a:r>
           </a:p>
@@ -1725,38 +1727,37 @@
           <a:p>
             <a:pPr lvl="0"/>
             <a:r>
-              <a:rPr lang="en-US" smtClean="0"/>
+              <a:rPr lang="en-US"/>
               <a:t>Click to edit Master text styles</a:t>
             </a:r>
           </a:p>
           <a:p>
             <a:pPr lvl="1"/>
             <a:r>
-              <a:rPr lang="en-US" smtClean="0"/>
+              <a:rPr lang="en-US"/>
               <a:t>Second level</a:t>
             </a:r>
           </a:p>
           <a:p>
             <a:pPr lvl="2"/>
             <a:r>
-              <a:rPr lang="en-US" smtClean="0"/>
+              <a:rPr lang="en-US"/>
               <a:t>Third level</a:t>
             </a:r>
           </a:p>
           <a:p>
             <a:pPr lvl="3"/>
             <a:r>
-              <a:rPr lang="en-US" smtClean="0"/>
+              <a:rPr lang="en-US"/>
               <a:t>Fourth level</a:t>
             </a:r>
           </a:p>
           <a:p>
             <a:pPr lvl="4"/>
             <a:r>
-              <a:rPr lang="en-US" smtClean="0"/>
+              <a:rPr lang="en-US"/>
               <a:t>Fifth level</a:t>
             </a:r>
-            <a:endParaRPr lang="en-US"/>
           </a:p>
         </p:txBody>
       </p:sp>
@@ -1777,7 +1778,7 @@
           <a:p>
             <a:fld id="{5BCAD085-E8A6-8845-BD4E-CB4CCA059FC4}" type="datetimeFigureOut">
               <a:rPr lang="en-US" smtClean="0"/>
-              <a:t>1/27/13</a:t>
+              <a:t>4/13/2026</a:t>
             </a:fld>
             <a:endParaRPr lang="en-US"/>
           </a:p>
@@ -1819,7 +1820,7 @@
           <a:p>
             <a:fld id="{C1FF6DA9-008F-8B48-92A6-B652298478BF}" type="slidenum">
               <a:rPr lang="en-US" smtClean="0"/>
-              <a:t>‹#›</a:t>
+              <a:t>‹N°›</a:t>
             </a:fld>
             <a:endParaRPr lang="en-US"/>
           </a:p>
@@ -1871,10 +1872,9 @@
           <a:lstStyle/>
           <a:p>
             <a:r>
-              <a:rPr lang="en-US" smtClean="0"/>
+              <a:rPr lang="en-US"/>
               <a:t>Click to edit Master title style</a:t>
             </a:r>
-            <a:endParaRPr lang="en-US"/>
           </a:p>
         </p:txBody>
       </p:sp>
@@ -1895,7 +1895,7 @@
           <a:p>
             <a:fld id="{5BCAD085-E8A6-8845-BD4E-CB4CCA059FC4}" type="datetimeFigureOut">
               <a:rPr lang="en-US" smtClean="0"/>
-              <a:t>1/27/13</a:t>
+              <a:t>4/13/2026</a:t>
             </a:fld>
             <a:endParaRPr lang="en-US"/>
           </a:p>
@@ -1937,7 +1937,7 @@
           <a:p>
             <a:fld id="{C1FF6DA9-008F-8B48-92A6-B652298478BF}" type="slidenum">
               <a:rPr lang="en-US" smtClean="0"/>
-              <a:t>‹#›</a:t>
+              <a:t>‹N°›</a:t>
             </a:fld>
             <a:endParaRPr lang="en-US"/>
           </a:p>
@@ -1990,7 +1990,7 @@
           <a:p>
             <a:fld id="{5BCAD085-E8A6-8845-BD4E-CB4CCA059FC4}" type="datetimeFigureOut">
               <a:rPr lang="en-US" smtClean="0"/>
-              <a:t>1/27/13</a:t>
+              <a:t>4/13/2026</a:t>
             </a:fld>
             <a:endParaRPr lang="en-US"/>
           </a:p>
@@ -2032,7 +2032,7 @@
           <a:p>
             <a:fld id="{C1FF6DA9-008F-8B48-92A6-B652298478BF}" type="slidenum">
               <a:rPr lang="en-US" smtClean="0"/>
-              <a:t>‹#›</a:t>
+              <a:t>‹N°›</a:t>
             </a:fld>
             <a:endParaRPr lang="en-US"/>
           </a:p>
@@ -2093,10 +2093,9 @@
           </a:lstStyle>
           <a:p>
             <a:r>
-              <a:rPr lang="en-US" smtClean="0"/>
+              <a:rPr lang="en-US"/>
               <a:t>Click to edit Master title style</a:t>
             </a:r>
-            <a:endParaRPr lang="en-US"/>
           </a:p>
         </p:txBody>
       </p:sp>
@@ -2150,38 +2149,37 @@
           <a:p>
             <a:pPr lvl="0"/>
             <a:r>
-              <a:rPr lang="en-US" smtClean="0"/>
+              <a:rPr lang="en-US"/>
               <a:t>Click to edit Master text styles</a:t>
             </a:r>
           </a:p>
           <a:p>
             <a:pPr lvl="1"/>
             <a:r>
-              <a:rPr lang="en-US" smtClean="0"/>
+              <a:rPr lang="en-US"/>
               <a:t>Second level</a:t>
             </a:r>
           </a:p>
           <a:p>
             <a:pPr lvl="2"/>
             <a:r>
-              <a:rPr lang="en-US" smtClean="0"/>
+              <a:rPr lang="en-US"/>
               <a:t>Third level</a:t>
             </a:r>
           </a:p>
           <a:p>
             <a:pPr lvl="3"/>
             <a:r>
-              <a:rPr lang="en-US" smtClean="0"/>
+              <a:rPr lang="en-US"/>
               <a:t>Fourth level</a:t>
             </a:r>
           </a:p>
           <a:p>
             <a:pPr lvl="4"/>
             <a:r>
-              <a:rPr lang="en-US" smtClean="0"/>
+              <a:rPr lang="en-US"/>
               <a:t>Fifth level</a:t>
             </a:r>
-            <a:endParaRPr lang="en-US"/>
           </a:p>
         </p:txBody>
       </p:sp>
@@ -2244,7 +2242,7 @@
           <a:p>
             <a:pPr lvl="0"/>
             <a:r>
-              <a:rPr lang="en-US" smtClean="0"/>
+              <a:rPr lang="en-US"/>
               <a:t>Click to edit Master text styles</a:t>
             </a:r>
           </a:p>
@@ -2267,7 +2265,7 @@
           <a:p>
             <a:fld id="{5BCAD085-E8A6-8845-BD4E-CB4CCA059FC4}" type="datetimeFigureOut">
               <a:rPr lang="en-US" smtClean="0"/>
-              <a:t>1/27/13</a:t>
+              <a:t>4/13/2026</a:t>
             </a:fld>
             <a:endParaRPr lang="en-US"/>
           </a:p>
@@ -2309,7 +2307,7 @@
           <a:p>
             <a:fld id="{C1FF6DA9-008F-8B48-92A6-B652298478BF}" type="slidenum">
               <a:rPr lang="en-US" smtClean="0"/>
-              <a:t>‹#›</a:t>
+              <a:t>‹N°›</a:t>
             </a:fld>
             <a:endParaRPr lang="en-US"/>
           </a:p>
@@ -2370,10 +2368,9 @@
           </a:lstStyle>
           <a:p>
             <a:r>
-              <a:rPr lang="en-US" smtClean="0"/>
+              <a:rPr lang="en-US"/>
               <a:t>Click to edit Master title style</a:t>
             </a:r>
-            <a:endParaRPr lang="en-US"/>
           </a:p>
         </p:txBody>
       </p:sp>
@@ -2497,7 +2494,7 @@
           <a:p>
             <a:pPr lvl="0"/>
             <a:r>
-              <a:rPr lang="en-US" smtClean="0"/>
+              <a:rPr lang="en-US"/>
               <a:t>Click to edit Master text styles</a:t>
             </a:r>
           </a:p>
@@ -2520,7 +2517,7 @@
           <a:p>
             <a:fld id="{5BCAD085-E8A6-8845-BD4E-CB4CCA059FC4}" type="datetimeFigureOut">
               <a:rPr lang="en-US" smtClean="0"/>
-              <a:t>1/27/13</a:t>
+              <a:t>4/13/2026</a:t>
             </a:fld>
             <a:endParaRPr lang="en-US"/>
           </a:p>
@@ -2562,7 +2559,7 @@
           <a:p>
             <a:fld id="{C1FF6DA9-008F-8B48-92A6-B652298478BF}" type="slidenum">
               <a:rPr lang="en-US" smtClean="0"/>
-              <a:t>‹#›</a:t>
+              <a:t>‹N°›</a:t>
             </a:fld>
             <a:endParaRPr lang="en-US"/>
           </a:p>
@@ -2629,10 +2626,9 @@
           <a:lstStyle/>
           <a:p>
             <a:r>
-              <a:rPr lang="en-US" smtClean="0"/>
+              <a:rPr lang="en-US"/>
               <a:t>Click to edit Master title style</a:t>
             </a:r>
-            <a:endParaRPr lang="en-US"/>
           </a:p>
         </p:txBody>
       </p:sp>
@@ -2663,38 +2659,37 @@
           <a:p>
             <a:pPr lvl="0"/>
             <a:r>
-              <a:rPr lang="en-US" smtClean="0"/>
+              <a:rPr lang="en-US"/>
               <a:t>Click to edit Master text styles</a:t>
             </a:r>
           </a:p>
           <a:p>
             <a:pPr lvl="1"/>
             <a:r>
-              <a:rPr lang="en-US" smtClean="0"/>
+              <a:rPr lang="en-US"/>
               <a:t>Second level</a:t>
             </a:r>
           </a:p>
           <a:p>
             <a:pPr lvl="2"/>
             <a:r>
-              <a:rPr lang="en-US" smtClean="0"/>
+              <a:rPr lang="en-US"/>
               <a:t>Third level</a:t>
             </a:r>
           </a:p>
           <a:p>
             <a:pPr lvl="3"/>
             <a:r>
-              <a:rPr lang="en-US" smtClean="0"/>
+              <a:rPr lang="en-US"/>
               <a:t>Fourth level</a:t>
             </a:r>
           </a:p>
           <a:p>
             <a:pPr lvl="4"/>
             <a:r>
-              <a:rPr lang="en-US" smtClean="0"/>
+              <a:rPr lang="en-US"/>
               <a:t>Fifth level</a:t>
             </a:r>
-            <a:endParaRPr lang="en-US"/>
           </a:p>
         </p:txBody>
       </p:sp>
@@ -2733,7 +2728,7 @@
           <a:p>
             <a:fld id="{5BCAD085-E8A6-8845-BD4E-CB4CCA059FC4}" type="datetimeFigureOut">
               <a:rPr lang="en-US" smtClean="0"/>
-              <a:t>1/27/13</a:t>
+              <a:t>4/13/2026</a:t>
             </a:fld>
             <a:endParaRPr lang="en-US"/>
           </a:p>
@@ -2811,7 +2806,7 @@
           <a:p>
             <a:fld id="{C1FF6DA9-008F-8B48-92A6-B652298478BF}" type="slidenum">
               <a:rPr lang="en-US" smtClean="0"/>
-              <a:t>‹#›</a:t>
+              <a:t>‹N°›</a:t>
             </a:fld>
             <a:endParaRPr lang="en-US"/>
           </a:p>
@@ -3092,7 +3087,7 @@
 </file>
 
 <file path=ppt/slides/slide1.xml><?xml version="1.0" encoding="utf-8"?>
-<p:sld xmlns:a="http://schemas.openxmlformats.org/drawingml/2006/main" xmlns:p="http://schemas.openxmlformats.org/presentationml/2006/main" xmlns:r="http://schemas.openxmlformats.org/officeDocument/2006/relationships">
+<p:sld xmlns:a="http://schemas.openxmlformats.org/drawingml/2006/main" xmlns:r="http://schemas.openxmlformats.org/officeDocument/2006/relationships" xmlns:p="http://schemas.openxmlformats.org/presentationml/2006/main">
   <p:cSld>
     <p:spTree>
       <p:nvGrpSpPr>
@@ -3100,7 +3095,14 @@
         <p:cNvGrpSpPr/>
         <p:nvPr/>
       </p:nvGrpSpPr>
-      <p:grpSpPr/>
+      <p:grpSpPr>
+        <a:xfrm>
+          <a:off x="0" y="0"/>
+          <a:ext cx="0" cy="0"/>
+          <a:chOff x="0" y="0"/>
+          <a:chExt cx="0" cy="0"/>
+        </a:xfrm>
+      </p:grpSpPr>
       <p:sp>
         <p:nvSpPr>
           <p:cNvPr id="2" name="Rectangle 1"/>
@@ -3149,6 +3151,7 @@
           <a:lstStyle/>
           <a:p>
             <a:pPr algn="ctr"/>
+            <a:endParaRPr/>
           </a:p>
         </p:txBody>
       </p:sp>
@@ -3203,7 +3206,7 @@
         <p:spPr>
           <a:xfrm>
             <a:off x="914400" y="2103120"/>
-            <a:ext cx="10332720" cy="548640"/>
+            <a:ext cx="10332720" cy="400110"/>
           </a:xfrm>
           <a:prstGeom prst="rect">
             <a:avLst/>
@@ -3231,8 +3234,42 @@
               </a:defRPr>
             </a:pPr>
             <a:r>
-              <a:t>Plateforme de ressources pour l'amelioration des relations entre citoyens</a:t>
-            </a:r>
+              <a:rPr dirty="0" err="1"/>
+              <a:t>Plateforme</a:t>
+            </a:r>
+            <a:r>
+              <a:rPr dirty="0"/>
+              <a:t> de </a:t>
+            </a:r>
+            <a:r>
+              <a:rPr dirty="0" err="1"/>
+              <a:t>ressources</a:t>
+            </a:r>
+            <a:r>
+              <a:rPr dirty="0"/>
+              <a:t> pour </a:t>
+            </a:r>
+            <a:r>
+              <a:rPr dirty="0" err="1"/>
+              <a:t>l'am</a:t>
+            </a:r>
+            <a:r>
+              <a:rPr lang="fr-FR" dirty="0"/>
+              <a:t>é</a:t>
+            </a:r>
+            <a:r>
+              <a:rPr dirty="0" err="1"/>
+              <a:t>lioration</a:t>
+            </a:r>
+            <a:r>
+              <a:rPr dirty="0"/>
+              <a:t> des relations entre </a:t>
+            </a:r>
+            <a:r>
+              <a:rPr dirty="0" err="1"/>
+              <a:t>citoyens</a:t>
+            </a:r>
+            <a:endParaRPr dirty="0"/>
           </a:p>
         </p:txBody>
       </p:sp>
@@ -3276,6 +3313,7 @@
           <a:lstStyle/>
           <a:p>
             <a:pPr algn="ctr"/>
+            <a:endParaRPr/>
           </a:p>
         </p:txBody>
       </p:sp>
@@ -3363,6 +3401,7 @@
           <a:lstStyle/>
           <a:p>
             <a:pPr algn="ctr"/>
+            <a:endParaRPr/>
           </a:p>
         </p:txBody>
       </p:sp>
@@ -3534,6 +3573,7 @@
           <a:lstStyle/>
           <a:p>
             <a:pPr algn="ctr"/>
+            <a:endParaRPr/>
           </a:p>
         </p:txBody>
       </p:sp>
@@ -3705,6 +3745,7 @@
           <a:lstStyle/>
           <a:p>
             <a:pPr algn="ctr"/>
+            <a:endParaRPr/>
           </a:p>
         </p:txBody>
       </p:sp>
@@ -3876,6 +3917,7 @@
           <a:lstStyle/>
           <a:p>
             <a:pPr algn="ctr"/>
+            <a:endParaRPr/>
           </a:p>
         </p:txBody>
       </p:sp>
@@ -4098,7 +4140,7 @@
 </file>
 
 <file path=ppt/slides/slide10.xml><?xml version="1.0" encoding="utf-8"?>
-<p:sld xmlns:a="http://schemas.openxmlformats.org/drawingml/2006/main" xmlns:p="http://schemas.openxmlformats.org/presentationml/2006/main" xmlns:r="http://schemas.openxmlformats.org/officeDocument/2006/relationships">
+<p:sld xmlns:a="http://schemas.openxmlformats.org/drawingml/2006/main" xmlns:r="http://schemas.openxmlformats.org/officeDocument/2006/relationships" xmlns:p="http://schemas.openxmlformats.org/presentationml/2006/main">
   <p:cSld>
     <p:bg>
       <p:bgPr>
@@ -4114,7 +4156,14 @@
         <p:cNvGrpSpPr/>
         <p:nvPr/>
       </p:nvGrpSpPr>
-      <p:grpSpPr/>
+      <p:grpSpPr>
+        <a:xfrm>
+          <a:off x="0" y="0"/>
+          <a:ext cx="0" cy="0"/>
+          <a:chOff x="0" y="0"/>
+          <a:chExt cx="0" cy="0"/>
+        </a:xfrm>
+      </p:grpSpPr>
       <p:sp>
         <p:nvSpPr>
           <p:cNvPr id="2" name="Rectangle 1"/>
@@ -4155,6 +4204,7 @@
           <a:lstStyle/>
           <a:p>
             <a:pPr algn="ctr"/>
+            <a:endParaRPr/>
           </a:p>
         </p:txBody>
       </p:sp>
@@ -4290,48 +4340,6 @@
             </a:pPr>
             <a:r>
               <a:t>React Native / Expo — Cross-platform</a:t>
-            </a:r>
-          </a:p>
-        </p:txBody>
-      </p:sp>
-      <p:sp>
-        <p:nvSpPr>
-          <p:cNvPr id="6" name="TextBox 5"/>
-          <p:cNvSpPr txBox="1"/>
-          <p:nvPr/>
-        </p:nvSpPr>
-        <p:spPr>
-          <a:xfrm>
-            <a:off x="10180015" y="320040"/>
-            <a:ext cx="1645920" cy="365760"/>
-          </a:xfrm>
-          <a:prstGeom prst="rect">
-            <a:avLst/>
-          </a:prstGeom>
-          <a:noFill/>
-        </p:spPr>
-        <p:txBody>
-          <a:bodyPr wrap="square">
-            <a:spAutoFit/>
-          </a:bodyPr>
-          <a:lstStyle/>
-          <a:p>
-            <a:pPr algn="r">
-              <a:lnSpc>
-                <a:spcPts val="1320"/>
-              </a:lnSpc>
-              <a:spcAft>
-                <a:spcPts val="400"/>
-              </a:spcAft>
-              <a:defRPr sz="1100" b="0" i="1">
-                <a:solidFill>
-                  <a:srgbClr val="AABBDD"/>
-                </a:solidFill>
-                <a:latin typeface="Calibri"/>
-              </a:defRPr>
-            </a:pPr>
-            <a:r>
-              <a:t>1 min 30</a:t>
             </a:r>
           </a:p>
         </p:txBody>
@@ -4375,7 +4383,7 @@
           </a:fontRef>
         </p:style>
         <p:txBody>
-          <a:bodyPr rtlCol="0" anchor="ctr" wrap="square"/>
+          <a:bodyPr wrap="square" rtlCol="0" anchor="ctr"/>
           <a:lstStyle/>
           <a:p>
             <a:pPr algn="ctr">
@@ -4395,7 +4403,7 @@
             <a:br/>
             <a:br/>
             <a:r>
-              <a:t>Ecrans React Navigation (stack/tab)</a:t>
+              <a:t>Expo Router (file-based) + Stack natif</a:t>
             </a:r>
             <a:br/>
             <a:r>
@@ -4403,7 +4411,7 @@
             </a:r>
             <a:br/>
             <a:r>
-              <a:t>→ AsyncStorage pour le token</a:t>
+              <a:t>→ expo-secure-store (Keychain / Keystore)</a:t>
             </a:r>
           </a:p>
         </p:txBody>
@@ -4490,6 +4498,7 @@
           <a:lstStyle/>
           <a:p>
             <a:pPr algn="ctr"/>
+            <a:endParaRPr/>
           </a:p>
         </p:txBody>
       </p:sp>
@@ -4575,6 +4584,7 @@
           <a:lstStyle/>
           <a:p>
             <a:pPr algn="ctr"/>
+            <a:endParaRPr/>
           </a:p>
         </p:txBody>
       </p:sp>
@@ -4660,6 +4670,7 @@
           <a:lstStyle/>
           <a:p>
             <a:pPr algn="ctr"/>
+            <a:endParaRPr/>
           </a:p>
         </p:txBody>
       </p:sp>
@@ -4745,6 +4756,7 @@
           <a:lstStyle/>
           <a:p>
             <a:pPr algn="ctr"/>
+            <a:endParaRPr/>
           </a:p>
         </p:txBody>
       </p:sp>
@@ -4830,6 +4842,7 @@
           <a:lstStyle/>
           <a:p>
             <a:pPr algn="ctr"/>
+            <a:endParaRPr/>
           </a:p>
         </p:txBody>
       </p:sp>
@@ -4870,7 +4883,7 @@
               </a:defRPr>
             </a:pPr>
             <a:r>
-              <a:t>Acces rapide ressources</a:t>
+              <a:t>Liste ressources + filtres</a:t>
             </a:r>
           </a:p>
         </p:txBody>
@@ -4915,6 +4928,7 @@
           <a:lstStyle/>
           <a:p>
             <a:pPr algn="ctr"/>
+            <a:endParaRPr/>
           </a:p>
         </p:txBody>
       </p:sp>
@@ -5000,6 +5014,7 @@
           <a:lstStyle/>
           <a:p>
             <a:pPr algn="ctr"/>
+            <a:endParaRPr/>
           </a:p>
         </p:txBody>
       </p:sp>
@@ -5040,7 +5055,7 @@
               </a:defRPr>
             </a:pPr>
             <a:r>
-              <a:t>Ressources</a:t>
+              <a:t>Creation</a:t>
             </a:r>
           </a:p>
         </p:txBody>
@@ -5085,6 +5100,7 @@
           <a:lstStyle/>
           <a:p>
             <a:pPr algn="ctr"/>
+            <a:endParaRPr/>
           </a:p>
         </p:txBody>
       </p:sp>
@@ -5125,7 +5141,7 @@
               </a:defRPr>
             </a:pPr>
             <a:r>
-              <a:t>Liste + filtres + recherche</a:t>
+              <a:t>Creation ressource</a:t>
             </a:r>
           </a:p>
         </p:txBody>
@@ -5170,6 +5186,7 @@
           <a:lstStyle/>
           <a:p>
             <a:pPr algn="ctr"/>
+            <a:endParaRPr/>
           </a:p>
         </p:txBody>
       </p:sp>
@@ -5210,7 +5227,7 @@
               </a:defRPr>
             </a:pPr>
             <a:r>
-              <a:t>GET /api/resources?...</a:t>
+              <a:t>POST /api/resources</a:t>
             </a:r>
           </a:p>
         </p:txBody>
@@ -5255,6 +5272,7 @@
           <a:lstStyle/>
           <a:p>
             <a:pPr algn="ctr"/>
+            <a:endParaRPr/>
           </a:p>
         </p:txBody>
       </p:sp>
@@ -5340,6 +5358,7 @@
           <a:lstStyle/>
           <a:p>
             <a:pPr algn="ctr"/>
+            <a:endParaRPr/>
           </a:p>
         </p:txBody>
       </p:sp>
@@ -5380,7 +5399,7 @@
               </a:defRPr>
             </a:pPr>
             <a:r>
-              <a:t>Contenu, commentaires, favori</a:t>
+              <a:t>Detail + commentaires + favori</a:t>
             </a:r>
           </a:p>
         </p:txBody>
@@ -5425,6 +5444,7 @@
           <a:lstStyle/>
           <a:p>
             <a:pPr algn="ctr"/>
+            <a:endParaRPr/>
           </a:p>
         </p:txBody>
       </p:sp>
@@ -5510,6 +5530,7 @@
           <a:lstStyle/>
           <a:p>
             <a:pPr algn="ctr"/>
+            <a:endParaRPr/>
           </a:p>
         </p:txBody>
       </p:sp>
@@ -5595,6 +5616,7 @@
           <a:lstStyle/>
           <a:p>
             <a:pPr algn="ctr"/>
+            <a:endParaRPr/>
           </a:p>
         </p:txBody>
       </p:sp>
@@ -5680,6 +5702,7 @@
           <a:lstStyle/>
           <a:p>
             <a:pPr algn="ctr"/>
+            <a:endParaRPr/>
           </a:p>
         </p:txBody>
       </p:sp>
@@ -5765,6 +5788,7 @@
           <a:lstStyle/>
           <a:p>
             <a:pPr algn="ctr"/>
+            <a:endParaRPr/>
           </a:p>
         </p:txBody>
       </p:sp>
@@ -5850,6 +5874,7 @@
           <a:lstStyle/>
           <a:p>
             <a:pPr algn="ctr"/>
+            <a:endParaRPr/>
           </a:p>
         </p:txBody>
       </p:sp>
@@ -5890,7 +5915,7 @@
               </a:defRPr>
             </a:pPr>
             <a:r>
-              <a:t>Info utilisateur</a:t>
+              <a:t>Profil + deconnexion</a:t>
             </a:r>
           </a:p>
         </p:txBody>
@@ -5935,6 +5960,7 @@
           <a:lstStyle/>
           <a:p>
             <a:pPr algn="ctr"/>
+            <a:endParaRPr/>
           </a:p>
         </p:txBody>
       </p:sp>
@@ -6020,6 +6046,7 @@
           <a:lstStyle/>
           <a:p>
             <a:pPr algn="ctr"/>
+            <a:endParaRPr/>
           </a:p>
         </p:txBody>
       </p:sp>
@@ -6060,7 +6087,7 @@
               </a:defRPr>
             </a:pPr>
             <a:r>
-              <a:t>Progression</a:t>
+              <a:t>Favoris</a:t>
             </a:r>
           </a:p>
         </p:txBody>
@@ -6105,6 +6132,7 @@
           <a:lstStyle/>
           <a:p>
             <a:pPr algn="ctr"/>
+            <a:endParaRPr/>
           </a:p>
         </p:txBody>
       </p:sp>
@@ -6145,7 +6173,7 @@
               </a:defRPr>
             </a:pPr>
             <a:r>
-              <a:t>Favoris, exploites</a:t>
+              <a:t>Liste des favoris</a:t>
             </a:r>
           </a:p>
         </p:txBody>
@@ -6190,6 +6218,7 @@
           <a:lstStyle/>
           <a:p>
             <a:pPr algn="ctr"/>
+            <a:endParaRPr/>
           </a:p>
         </p:txBody>
       </p:sp>
@@ -6230,7 +6259,7 @@
               </a:defRPr>
             </a:pPr>
             <a:r>
-              <a:t>GET /api/progression</a:t>
+              <a:t>GET /api/resources/{id}/favorite</a:t>
             </a:r>
           </a:p>
         </p:txBody>
@@ -6328,7 +6357,7 @@
 </file>
 
 <file path=ppt/slides/slide11.xml><?xml version="1.0" encoding="utf-8"?>
-<p:sld xmlns:a="http://schemas.openxmlformats.org/drawingml/2006/main" xmlns:p="http://schemas.openxmlformats.org/presentationml/2006/main" xmlns:r="http://schemas.openxmlformats.org/officeDocument/2006/relationships">
+<p:sld xmlns:a="http://schemas.openxmlformats.org/drawingml/2006/main" xmlns:r="http://schemas.openxmlformats.org/officeDocument/2006/relationships" xmlns:p="http://schemas.openxmlformats.org/presentationml/2006/main">
   <p:cSld>
     <p:bg>
       <p:bgPr>
@@ -6344,7 +6373,14 @@
         <p:cNvGrpSpPr/>
         <p:nvPr/>
       </p:nvGrpSpPr>
-      <p:grpSpPr/>
+      <p:grpSpPr>
+        <a:xfrm>
+          <a:off x="0" y="0"/>
+          <a:ext cx="0" cy="0"/>
+          <a:chOff x="0" y="0"/>
+          <a:chExt cx="0" cy="0"/>
+        </a:xfrm>
+      </p:grpSpPr>
       <p:sp>
         <p:nvSpPr>
           <p:cNvPr id="2" name="Rectangle 1"/>
@@ -6385,6 +6421,7 @@
           <a:lstStyle/>
           <a:p>
             <a:pPr algn="ctr"/>
+            <a:endParaRPr/>
           </a:p>
         </p:txBody>
       </p:sp>
@@ -6526,48 +6563,6 @@
       </p:sp>
       <p:sp>
         <p:nvSpPr>
-          <p:cNvPr id="6" name="TextBox 5"/>
-          <p:cNvSpPr txBox="1"/>
-          <p:nvPr/>
-        </p:nvSpPr>
-        <p:spPr>
-          <a:xfrm>
-            <a:off x="10180015" y="320040"/>
-            <a:ext cx="1645920" cy="365760"/>
-          </a:xfrm>
-          <a:prstGeom prst="rect">
-            <a:avLst/>
-          </a:prstGeom>
-          <a:noFill/>
-        </p:spPr>
-        <p:txBody>
-          <a:bodyPr wrap="square">
-            <a:spAutoFit/>
-          </a:bodyPr>
-          <a:lstStyle/>
-          <a:p>
-            <a:pPr algn="r">
-              <a:lnSpc>
-                <a:spcPts val="1320"/>
-              </a:lnSpc>
-              <a:spcAft>
-                <a:spcPts val="400"/>
-              </a:spcAft>
-              <a:defRPr sz="1100" b="0" i="1">
-                <a:solidFill>
-                  <a:srgbClr val="AABBDD"/>
-                </a:solidFill>
-                <a:latin typeface="Calibri"/>
-              </a:defRPr>
-            </a:pPr>
-            <a:r>
-              <a:t>1 min</a:t>
-            </a:r>
-          </a:p>
-        </p:txBody>
-      </p:sp>
-      <p:sp>
-        <p:nvSpPr>
           <p:cNvPr id="7" name="Rounded Rectangle 6"/>
           <p:cNvSpPr/>
           <p:nvPr/>
@@ -6606,6 +6601,7 @@
           <a:lstStyle/>
           <a:p>
             <a:pPr algn="ctr"/>
+            <a:endParaRPr/>
           </a:p>
         </p:txBody>
       </p:sp>
@@ -6733,6 +6729,7 @@
           <a:lstStyle/>
           <a:p>
             <a:pPr algn="ctr"/>
+            <a:endParaRPr/>
           </a:p>
         </p:txBody>
       </p:sp>
@@ -6787,7 +6784,7 @@
         <p:spPr>
           <a:xfrm>
             <a:off x="731520" y="2578608"/>
-            <a:ext cx="4754880" cy="320040"/>
+            <a:ext cx="4754880" cy="259045"/>
           </a:xfrm>
           <a:prstGeom prst="rect">
             <a:avLst/>
@@ -6815,7 +6812,24 @@
               </a:defRPr>
             </a:pPr>
             <a:r>
-              <a:t>FormRequest, regles declaratives</a:t>
+              <a:rPr dirty="0" err="1"/>
+              <a:t>FormRequest</a:t>
+            </a:r>
+            <a:r>
+              <a:rPr dirty="0"/>
+              <a:t>, r</a:t>
+            </a:r>
+            <a:r>
+              <a:rPr lang="fr-FR" dirty="0"/>
+              <a:t>è</a:t>
+            </a:r>
+            <a:r>
+              <a:rPr dirty="0" err="1"/>
+              <a:t>gles</a:t>
+            </a:r>
+            <a:r>
+              <a:rPr dirty="0"/>
+              <a:t> declaratives</a:t>
             </a:r>
           </a:p>
         </p:txBody>
@@ -6860,6 +6874,7 @@
           <a:lstStyle/>
           <a:p>
             <a:pPr algn="ctr"/>
+            <a:endParaRPr/>
           </a:p>
         </p:txBody>
       </p:sp>
@@ -6987,6 +7002,7 @@
           <a:lstStyle/>
           <a:p>
             <a:pPr algn="ctr"/>
+            <a:endParaRPr/>
           </a:p>
         </p:txBody>
       </p:sp>
@@ -7114,6 +7130,7 @@
           <a:lstStyle/>
           <a:p>
             <a:pPr algn="ctr"/>
+            <a:endParaRPr/>
           </a:p>
         </p:txBody>
       </p:sp>
@@ -7405,6 +7422,7 @@
           <a:lstStyle/>
           <a:p>
             <a:pPr algn="ctr"/>
+            <a:endParaRPr/>
           </a:p>
         </p:txBody>
       </p:sp>
@@ -7498,6 +7516,7 @@
           <a:lstStyle/>
           <a:p>
             <a:pPr algn="ctr"/>
+            <a:endParaRPr/>
           </a:p>
         </p:txBody>
       </p:sp>
@@ -7598,7 +7617,7 @@
 </file>
 
 <file path=ppt/slides/slide12.xml><?xml version="1.0" encoding="utf-8"?>
-<p:sld xmlns:a="http://schemas.openxmlformats.org/drawingml/2006/main" xmlns:p="http://schemas.openxmlformats.org/presentationml/2006/main" xmlns:r="http://schemas.openxmlformats.org/officeDocument/2006/relationships">
+<p:sld xmlns:a="http://schemas.openxmlformats.org/drawingml/2006/main" xmlns:r="http://schemas.openxmlformats.org/officeDocument/2006/relationships" xmlns:p="http://schemas.openxmlformats.org/presentationml/2006/main">
   <p:cSld>
     <p:bg>
       <p:bgPr>
@@ -7614,7 +7633,14 @@
         <p:cNvGrpSpPr/>
         <p:nvPr/>
       </p:nvGrpSpPr>
-      <p:grpSpPr/>
+      <p:grpSpPr>
+        <a:xfrm>
+          <a:off x="0" y="0"/>
+          <a:ext cx="0" cy="0"/>
+          <a:chOff x="0" y="0"/>
+          <a:chExt cx="0" cy="0"/>
+        </a:xfrm>
+      </p:grpSpPr>
       <p:sp>
         <p:nvSpPr>
           <p:cNvPr id="2" name="Rectangle 1"/>
@@ -7655,6 +7681,7 @@
           <a:lstStyle/>
           <a:p>
             <a:pPr algn="ctr"/>
+            <a:endParaRPr/>
           </a:p>
         </p:txBody>
       </p:sp>
@@ -7796,48 +7823,6 @@
       </p:sp>
       <p:sp>
         <p:nvSpPr>
-          <p:cNvPr id="6" name="TextBox 5"/>
-          <p:cNvSpPr txBox="1"/>
-          <p:nvPr/>
-        </p:nvSpPr>
-        <p:spPr>
-          <a:xfrm>
-            <a:off x="10180015" y="320040"/>
-            <a:ext cx="1645920" cy="365760"/>
-          </a:xfrm>
-          <a:prstGeom prst="rect">
-            <a:avLst/>
-          </a:prstGeom>
-          <a:noFill/>
-        </p:spPr>
-        <p:txBody>
-          <a:bodyPr wrap="square">
-            <a:spAutoFit/>
-          </a:bodyPr>
-          <a:lstStyle/>
-          <a:p>
-            <a:pPr algn="r">
-              <a:lnSpc>
-                <a:spcPts val="1320"/>
-              </a:lnSpc>
-              <a:spcAft>
-                <a:spcPts val="400"/>
-              </a:spcAft>
-              <a:defRPr sz="1100" b="0" i="1">
-                <a:solidFill>
-                  <a:srgbClr val="AABBDD"/>
-                </a:solidFill>
-                <a:latin typeface="Calibri"/>
-              </a:defRPr>
-            </a:pPr>
-            <a:r>
-              <a:t>1 min</a:t>
-            </a:r>
-          </a:p>
-        </p:txBody>
-      </p:sp>
-      <p:sp>
-        <p:nvSpPr>
           <p:cNvPr id="7" name="TextBox 6"/>
           <p:cNvSpPr txBox="1"/>
           <p:nvPr/>
@@ -7918,6 +7903,7 @@
           <a:lstStyle/>
           <a:p>
             <a:pPr algn="ctr"/>
+            <a:endParaRPr/>
           </a:p>
         </p:txBody>
       </p:sp>
@@ -8091,6 +8077,7 @@
           <a:lstStyle/>
           <a:p>
             <a:pPr algn="ctr"/>
+            <a:endParaRPr/>
           </a:p>
         </p:txBody>
       </p:sp>
@@ -8264,6 +8251,7 @@
           <a:lstStyle/>
           <a:p>
             <a:pPr algn="ctr"/>
+            <a:endParaRPr/>
           </a:p>
         </p:txBody>
       </p:sp>
@@ -8437,6 +8425,7 @@
           <a:lstStyle/>
           <a:p>
             <a:pPr algn="ctr"/>
+            <a:endParaRPr/>
           </a:p>
         </p:txBody>
       </p:sp>
@@ -8579,7 +8568,7 @@
         <p:spPr>
           <a:xfrm>
             <a:off x="731520" y="4297680"/>
-            <a:ext cx="5486400" cy="1371600"/>
+            <a:ext cx="5486400" cy="889731"/>
           </a:xfrm>
           <a:prstGeom prst="rect">
             <a:avLst/>
@@ -8607,7 +8596,16 @@
               </a:defRPr>
             </a:pPr>
             <a:r>
-              <a:t>   main         Production stable, merge en fin de sprint</a:t>
+              <a:rPr dirty="0"/>
+              <a:t>   main         Production stable, merge </a:t>
+            </a:r>
+            <a:r>
+              <a:rPr dirty="0" err="1"/>
+              <a:t>en</a:t>
+            </a:r>
+            <a:r>
+              <a:rPr dirty="0"/>
+              <a:t> fin de sprint</a:t>
             </a:r>
           </a:p>
           <a:p>
@@ -8626,7 +8624,40 @@
               </a:defRPr>
             </a:pPr>
             <a:r>
-              <a:t>   develop     Integration, toutes les features mergees via PR</a:t>
+              <a:rPr dirty="0"/>
+              <a:t>   develop     Int</a:t>
+            </a:r>
+            <a:r>
+              <a:rPr lang="fr-FR" dirty="0"/>
+              <a:t>é</a:t>
+            </a:r>
+            <a:r>
+              <a:rPr dirty="0" err="1"/>
+              <a:t>gration</a:t>
+            </a:r>
+            <a:r>
+              <a:rPr dirty="0"/>
+              <a:t>, </a:t>
+            </a:r>
+            <a:r>
+              <a:rPr dirty="0" err="1"/>
+              <a:t>toutes</a:t>
+            </a:r>
+            <a:r>
+              <a:rPr dirty="0"/>
+              <a:t> les features </a:t>
+            </a:r>
+            <a:r>
+              <a:rPr dirty="0" err="1"/>
+              <a:t>merg</a:t>
+            </a:r>
+            <a:r>
+              <a:rPr lang="fr-FR" dirty="0"/>
+              <a:t>é</a:t>
+            </a:r>
+            <a:r>
+              <a:rPr dirty="0"/>
+              <a:t>es via PR</a:t>
             </a:r>
           </a:p>
           <a:p>
@@ -8645,7 +8676,20 @@
               </a:defRPr>
             </a:pPr>
             <a:r>
-              <a:t>   feature/*   Branches par fonctionnalite, squash and merge</a:t>
+              <a:rPr dirty="0"/>
+              <a:t>   feature/*   Branches par </a:t>
+            </a:r>
+            <a:r>
+              <a:rPr dirty="0" err="1"/>
+              <a:t>fonctionnalit</a:t>
+            </a:r>
+            <a:r>
+              <a:rPr lang="fr-FR" dirty="0"/>
+              <a:t>é</a:t>
+            </a:r>
+            <a:r>
+              <a:rPr dirty="0"/>
+              <a:t>, squash and merge</a:t>
             </a:r>
           </a:p>
         </p:txBody>
@@ -8850,6 +8894,7 @@
           <a:lstStyle/>
           <a:p>
             <a:pPr algn="ctr"/>
+            <a:endParaRPr/>
           </a:p>
         </p:txBody>
       </p:sp>
@@ -8946,7 +8991,7 @@
 </file>
 
 <file path=ppt/slides/slide13.xml><?xml version="1.0" encoding="utf-8"?>
-<p:sld xmlns:a="http://schemas.openxmlformats.org/drawingml/2006/main" xmlns:p="http://schemas.openxmlformats.org/presentationml/2006/main" xmlns:r="http://schemas.openxmlformats.org/officeDocument/2006/relationships">
+<p:sld xmlns:a="http://schemas.openxmlformats.org/drawingml/2006/main" xmlns:r="http://schemas.openxmlformats.org/officeDocument/2006/relationships" xmlns:p="http://schemas.openxmlformats.org/presentationml/2006/main">
   <p:cSld>
     <p:bg>
       <p:bgPr>
@@ -8962,7 +9007,14 @@
         <p:cNvGrpSpPr/>
         <p:nvPr/>
       </p:nvGrpSpPr>
-      <p:grpSpPr/>
+      <p:grpSpPr>
+        <a:xfrm>
+          <a:off x="0" y="0"/>
+          <a:ext cx="0" cy="0"/>
+          <a:chOff x="0" y="0"/>
+          <a:chExt cx="0" cy="0"/>
+        </a:xfrm>
+      </p:grpSpPr>
       <p:sp>
         <p:nvSpPr>
           <p:cNvPr id="2" name="Rectangle 1"/>
@@ -9003,6 +9055,7 @@
           <a:lstStyle/>
           <a:p>
             <a:pPr algn="ctr"/>
+            <a:endParaRPr/>
           </a:p>
         </p:txBody>
       </p:sp>
@@ -9138,48 +9191,6 @@
             </a:pPr>
             <a:r>
               <a:t>Ce qui a bien fonctionne</a:t>
-            </a:r>
-          </a:p>
-        </p:txBody>
-      </p:sp>
-      <p:sp>
-        <p:nvSpPr>
-          <p:cNvPr id="6" name="TextBox 5"/>
-          <p:cNvSpPr txBox="1"/>
-          <p:nvPr/>
-        </p:nvSpPr>
-        <p:spPr>
-          <a:xfrm>
-            <a:off x="10180015" y="320040"/>
-            <a:ext cx="1645920" cy="365760"/>
-          </a:xfrm>
-          <a:prstGeom prst="rect">
-            <a:avLst/>
-          </a:prstGeom>
-          <a:noFill/>
-        </p:spPr>
-        <p:txBody>
-          <a:bodyPr wrap="square">
-            <a:spAutoFit/>
-          </a:bodyPr>
-          <a:lstStyle/>
-          <a:p>
-            <a:pPr algn="r">
-              <a:lnSpc>
-                <a:spcPts val="1320"/>
-              </a:lnSpc>
-              <a:spcAft>
-                <a:spcPts val="400"/>
-              </a:spcAft>
-              <a:defRPr sz="1100" b="0" i="1">
-                <a:solidFill>
-                  <a:srgbClr val="AABBDD"/>
-                </a:solidFill>
-                <a:latin typeface="Calibri"/>
-              </a:defRPr>
-            </a:pPr>
-            <a:r>
-              <a:t>1 min</a:t>
             </a:r>
           </a:p>
         </p:txBody>
@@ -9226,6 +9237,7 @@
           <a:lstStyle/>
           <a:p>
             <a:pPr algn="ctr"/>
+            <a:endParaRPr/>
           </a:p>
         </p:txBody>
       </p:sp>
@@ -9322,7 +9334,7 @@
         <p:spPr>
           <a:xfrm>
             <a:off x="731520" y="1874520"/>
-            <a:ext cx="2971800" cy="777240"/>
+            <a:ext cx="2971800" cy="492058"/>
           </a:xfrm>
           <a:prstGeom prst="rect">
             <a:avLst/>
@@ -9350,11 +9362,71 @@
               </a:defRPr>
             </a:pPr>
             <a:r>
-              <a:t>Laravel : maintenabilite, testabilite,</a:t>
-            </a:r>
-            <a:br/>
-            <a:r>
-              <a:t>separation claire des responsabilites</a:t>
+              <a:rPr dirty="0"/>
+              <a:t>Laravel : </a:t>
+            </a:r>
+            <a:r>
+              <a:rPr dirty="0" err="1"/>
+              <a:t>maintenabilit</a:t>
+            </a:r>
+            <a:r>
+              <a:rPr lang="fr-FR" dirty="0"/>
+              <a:t>é</a:t>
+            </a:r>
+            <a:r>
+              <a:rPr dirty="0"/>
+              <a:t>, </a:t>
+            </a:r>
+            <a:r>
+              <a:rPr dirty="0" err="1"/>
+              <a:t>testabilit</a:t>
+            </a:r>
+            <a:r>
+              <a:rPr lang="fr-FR" dirty="0"/>
+              <a:t>é</a:t>
+            </a:r>
+            <a:r>
+              <a:rPr dirty="0"/>
+              <a:t>,</a:t>
+            </a:r>
+            <a:br>
+              <a:rPr dirty="0"/>
+            </a:br>
+            <a:r>
+              <a:rPr dirty="0"/>
+              <a:t>s</a:t>
+            </a:r>
+            <a:r>
+              <a:rPr lang="fr-FR" dirty="0"/>
+              <a:t>é</a:t>
+            </a:r>
+            <a:r>
+              <a:rPr dirty="0" err="1"/>
+              <a:t>paration</a:t>
+            </a:r>
+            <a:r>
+              <a:rPr dirty="0"/>
+              <a:t> </a:t>
+            </a:r>
+            <a:r>
+              <a:rPr dirty="0" err="1"/>
+              <a:t>claire</a:t>
+            </a:r>
+            <a:r>
+              <a:rPr dirty="0"/>
+              <a:t> des </a:t>
+            </a:r>
+            <a:r>
+              <a:rPr dirty="0" err="1"/>
+              <a:t>responsabilit</a:t>
+            </a:r>
+            <a:r>
+              <a:rPr lang="fr-FR" dirty="0"/>
+              <a:t>é</a:t>
+            </a:r>
+            <a:r>
+              <a:rPr dirty="0"/>
+              <a:t>s</a:t>
             </a:r>
           </a:p>
         </p:txBody>
@@ -9401,6 +9473,7 @@
           <a:lstStyle/>
           <a:p>
             <a:pPr algn="ctr"/>
+            <a:endParaRPr/>
           </a:p>
         </p:txBody>
       </p:sp>
@@ -9455,7 +9528,7 @@
         <p:spPr>
           <a:xfrm>
             <a:off x="5074920" y="1508760"/>
-            <a:ext cx="2606040" cy="365760"/>
+            <a:ext cx="2606040" cy="323165"/>
           </a:xfrm>
           <a:prstGeom prst="rect">
             <a:avLst/>
@@ -9483,7 +9556,24 @@
               </a:defRPr>
             </a:pPr>
             <a:r>
-              <a:t>Securite renforcee</a:t>
+              <a:rPr dirty="0" err="1"/>
+              <a:t>Securite</a:t>
+            </a:r>
+            <a:r>
+              <a:rPr dirty="0"/>
+              <a:t> </a:t>
+            </a:r>
+            <a:r>
+              <a:rPr dirty="0" err="1"/>
+              <a:t>renforc</a:t>
+            </a:r>
+            <a:r>
+              <a:rPr lang="fr-FR" dirty="0"/>
+              <a:t>é</a:t>
+            </a:r>
+            <a:r>
+              <a:rPr dirty="0"/>
+              <a:t>e</a:t>
             </a:r>
           </a:p>
         </p:txBody>
@@ -9497,7 +9587,7 @@
         <p:spPr>
           <a:xfrm>
             <a:off x="4617720" y="1874520"/>
-            <a:ext cx="2971800" cy="777240"/>
+            <a:ext cx="2971800" cy="492058"/>
           </a:xfrm>
           <a:prstGeom prst="rect">
             <a:avLst/>
@@ -9525,10 +9615,38 @@
               </a:defRPr>
             </a:pPr>
             <a:r>
-              <a:t>Chiffrement donnees, anonymisation RGPD,</a:t>
-            </a:r>
-            <a:br/>
-            <a:r>
+              <a:rPr dirty="0" err="1"/>
+              <a:t>Chiffrement</a:t>
+            </a:r>
+            <a:r>
+              <a:rPr dirty="0"/>
+              <a:t> </a:t>
+            </a:r>
+            <a:r>
+              <a:rPr dirty="0" err="1"/>
+              <a:t>donn</a:t>
+            </a:r>
+            <a:r>
+              <a:rPr lang="fr-FR" dirty="0"/>
+              <a:t>é</a:t>
+            </a:r>
+            <a:r>
+              <a:rPr dirty="0"/>
+              <a:t>es, </a:t>
+            </a:r>
+            <a:r>
+              <a:rPr dirty="0" err="1"/>
+              <a:t>anonymisation</a:t>
+            </a:r>
+            <a:r>
+              <a:rPr dirty="0"/>
+              <a:t> RGPD,</a:t>
+            </a:r>
+            <a:br>
+              <a:rPr dirty="0"/>
+            </a:br>
+            <a:r>
+              <a:rPr dirty="0"/>
               <a:t>headers HTTP, rate limiting</a:t>
             </a:r>
           </a:p>
@@ -9576,6 +9694,7 @@
           <a:lstStyle/>
           <a:p>
             <a:pPr algn="ctr"/>
+            <a:endParaRPr/>
           </a:p>
         </p:txBody>
       </p:sp>
@@ -9630,7 +9749,7 @@
         <p:spPr>
           <a:xfrm>
             <a:off x="8961120" y="1508760"/>
-            <a:ext cx="2606040" cy="365760"/>
+            <a:ext cx="2606040" cy="323165"/>
           </a:xfrm>
           <a:prstGeom prst="rect">
             <a:avLst/>
@@ -9658,7 +9777,16 @@
               </a:defRPr>
             </a:pPr>
             <a:r>
-              <a:t>Accessibilite RGAA</a:t>
+              <a:rPr dirty="0" err="1"/>
+              <a:t>Accessibilit</a:t>
+            </a:r>
+            <a:r>
+              <a:rPr lang="fr-FR" dirty="0"/>
+              <a:t>é</a:t>
+            </a:r>
+            <a:r>
+              <a:rPr dirty="0"/>
+              <a:t> RGAA</a:t>
             </a:r>
           </a:p>
         </p:txBody>
@@ -9672,7 +9800,7 @@
         <p:spPr>
           <a:xfrm>
             <a:off x="8503920" y="1874520"/>
-            <a:ext cx="2971800" cy="777240"/>
+            <a:ext cx="2971800" cy="492058"/>
           </a:xfrm>
           <a:prstGeom prst="rect">
             <a:avLst/>
@@ -9700,11 +9828,31 @@
               </a:defRPr>
             </a:pPr>
             <a:r>
-              <a:t>Skip links, ARIA, focus visible, contraste AAA</a:t>
-            </a:r>
-            <a:br/>
-            <a:r>
-              <a:t>integres des la conception</a:t>
+              <a:rPr dirty="0"/>
+              <a:t>Skip links, ARIA, focus visible, </a:t>
+            </a:r>
+            <a:r>
+              <a:rPr dirty="0" err="1"/>
+              <a:t>contraste</a:t>
+            </a:r>
+            <a:r>
+              <a:rPr dirty="0"/>
+              <a:t> AAA</a:t>
+            </a:r>
+            <a:br>
+              <a:rPr dirty="0"/>
+            </a:br>
+            <a:r>
+              <a:rPr dirty="0" err="1"/>
+              <a:t>integr</a:t>
+            </a:r>
+            <a:r>
+              <a:rPr lang="fr-FR" dirty="0"/>
+              <a:t>é</a:t>
+            </a:r>
+            <a:r>
+              <a:rPr dirty="0"/>
+              <a:t>s des la conception</a:t>
             </a:r>
           </a:p>
         </p:txBody>
@@ -9751,6 +9899,7 @@
           <a:lstStyle/>
           <a:p>
             <a:pPr algn="ctr"/>
+            <a:endParaRPr/>
           </a:p>
         </p:txBody>
       </p:sp>
@@ -9833,7 +9982,7 @@
               </a:defRPr>
             </a:pPr>
             <a:r>
-              <a:t>27 tests backend + 117 tests frontend</a:t>
+              <a:t>30 tests backend + 14 tests mobile</a:t>
             </a:r>
           </a:p>
         </p:txBody>
@@ -9875,12 +10024,11 @@
               </a:defRPr>
             </a:pPr>
             <a:r>
-              <a:t>Backend : PHPUnit (Auth, CRUD, admin, moderation)</a:t>
+              <a:t>Backend : PHPUnit (Auth, CRUD, admin, moderation, interactions)
+Mobile : Jest + @testing-library/react-native (services)</a:t>
             </a:r>
             <a:br/>
-            <a:r>
-              <a:t>Frontend : Vitest + Testing Library (API, composants, contextes)</a:t>
-            </a:r>
+            <a:endParaRPr/>
           </a:p>
         </p:txBody>
       </p:sp>
@@ -9926,6 +10074,7 @@
           <a:lstStyle/>
           <a:p>
             <a:pPr algn="ctr"/>
+            <a:endParaRPr/>
           </a:p>
         </p:txBody>
       </p:sp>
@@ -10022,7 +10171,7 @@
         <p:spPr>
           <a:xfrm>
             <a:off x="4617720" y="3566160"/>
-            <a:ext cx="2971800" cy="777240"/>
+            <a:ext cx="2971800" cy="492058"/>
           </a:xfrm>
           <a:prstGeom prst="rect">
             <a:avLst/>
@@ -10050,12 +10199,45 @@
               </a:defRPr>
             </a:pPr>
             <a:r>
-              <a:t>4 services containerises, health checks,</a:t>
-            </a:r>
-            <a:br/>
-            <a:r>
-              <a:t>environnement identique pour tous</a:t>
-            </a:r>
+              <a:rPr dirty="0"/>
+              <a:t>4 services </a:t>
+            </a:r>
+            <a:r>
+              <a:rPr dirty="0" err="1"/>
+              <a:t>containeris</a:t>
+            </a:r>
+            <a:r>
+              <a:rPr lang="fr-FR" dirty="0"/>
+              <a:t>é</a:t>
+            </a:r>
+            <a:r>
+              <a:rPr dirty="0"/>
+              <a:t>s, health checks,</a:t>
+            </a:r>
+            <a:br>
+              <a:rPr dirty="0"/>
+            </a:br>
+            <a:r>
+              <a:rPr dirty="0" err="1"/>
+              <a:t>environnement</a:t>
+            </a:r>
+            <a:r>
+              <a:rPr dirty="0"/>
+              <a:t> </a:t>
+            </a:r>
+            <a:r>
+              <a:rPr dirty="0" err="1"/>
+              <a:t>identique</a:t>
+            </a:r>
+            <a:r>
+              <a:rPr dirty="0"/>
+              <a:t> pour </a:t>
+            </a:r>
+            <a:r>
+              <a:rPr dirty="0" err="1"/>
+              <a:t>tous</a:t>
+            </a:r>
+            <a:endParaRPr dirty="0"/>
           </a:p>
         </p:txBody>
       </p:sp>
@@ -10101,6 +10283,7 @@
           <a:lstStyle/>
           <a:p>
             <a:pPr algn="ctr"/>
+            <a:endParaRPr/>
           </a:p>
         </p:txBody>
       </p:sp>
@@ -10155,7 +10338,7 @@
         <p:spPr>
           <a:xfrm>
             <a:off x="8961120" y="3200400"/>
-            <a:ext cx="2606040" cy="365760"/>
+            <a:ext cx="2606040" cy="323165"/>
           </a:xfrm>
           <a:prstGeom prst="rect">
             <a:avLst/>
@@ -10183,8 +10366,18 @@
               </a:defRPr>
             </a:pPr>
             <a:r>
-              <a:t>Workflow Git structure</a:t>
-            </a:r>
+              <a:rPr dirty="0"/>
+              <a:t>Workflow Git </a:t>
+            </a:r>
+            <a:r>
+              <a:rPr dirty="0" err="1"/>
+              <a:t>structur</a:t>
+            </a:r>
+            <a:r>
+              <a:rPr lang="fr-FR" dirty="0"/>
+              <a:t>é</a:t>
+            </a:r>
+            <a:endParaRPr dirty="0"/>
           </a:p>
         </p:txBody>
       </p:sp>
@@ -10285,7 +10478,7 @@
 </file>
 
 <file path=ppt/slides/slide14.xml><?xml version="1.0" encoding="utf-8"?>
-<p:sld xmlns:a="http://schemas.openxmlformats.org/drawingml/2006/main" xmlns:p="http://schemas.openxmlformats.org/presentationml/2006/main" xmlns:r="http://schemas.openxmlformats.org/officeDocument/2006/relationships">
+<p:sld xmlns:a="http://schemas.openxmlformats.org/drawingml/2006/main" xmlns:r="http://schemas.openxmlformats.org/officeDocument/2006/relationships" xmlns:p="http://schemas.openxmlformats.org/presentationml/2006/main">
   <p:cSld>
     <p:spTree>
       <p:nvGrpSpPr>
@@ -10293,7 +10486,14 @@
         <p:cNvGrpSpPr/>
         <p:nvPr/>
       </p:nvGrpSpPr>
-      <p:grpSpPr/>
+      <p:grpSpPr>
+        <a:xfrm>
+          <a:off x="0" y="0"/>
+          <a:ext cx="0" cy="0"/>
+          <a:chOff x="0" y="0"/>
+          <a:chExt cx="0" cy="0"/>
+        </a:xfrm>
+      </p:grpSpPr>
       <p:sp>
         <p:nvSpPr>
           <p:cNvPr id="2" name="Rectangle 1"/>
@@ -10342,6 +10542,7 @@
           <a:lstStyle/>
           <a:p>
             <a:pPr algn="ctr"/>
+            <a:endParaRPr/>
           </a:p>
         </p:txBody>
       </p:sp>
@@ -10469,6 +10670,7 @@
           <a:lstStyle/>
           <a:p>
             <a:pPr algn="ctr"/>
+            <a:endParaRPr/>
           </a:p>
         </p:txBody>
       </p:sp>
@@ -10556,6 +10758,7 @@
           <a:lstStyle/>
           <a:p>
             <a:pPr algn="ctr"/>
+            <a:endParaRPr/>
           </a:p>
         </p:txBody>
       </p:sp>
@@ -10647,6 +10850,7 @@
           <a:lstStyle/>
           <a:p>
             <a:pPr algn="ctr"/>
+            <a:endParaRPr/>
           </a:p>
         </p:txBody>
       </p:sp>
@@ -10734,6 +10938,7 @@
           <a:lstStyle/>
           <a:p>
             <a:pPr algn="ctr"/>
+            <a:endParaRPr/>
           </a:p>
         </p:txBody>
       </p:sp>
@@ -10823,6 +11028,7 @@
           <a:lstStyle/>
           <a:p>
             <a:pPr algn="ctr"/>
+            <a:endParaRPr/>
           </a:p>
         </p:txBody>
       </p:sp>
@@ -10910,6 +11116,7 @@
           <a:lstStyle/>
           <a:p>
             <a:pPr algn="ctr"/>
+            <a:endParaRPr/>
           </a:p>
         </p:txBody>
       </p:sp>
@@ -11001,6 +11208,7 @@
           <a:lstStyle/>
           <a:p>
             <a:pPr algn="ctr"/>
+            <a:endParaRPr/>
           </a:p>
         </p:txBody>
       </p:sp>
@@ -11092,6 +11300,7 @@
           <a:lstStyle/>
           <a:p>
             <a:pPr algn="ctr"/>
+            <a:endParaRPr/>
           </a:p>
         </p:txBody>
       </p:sp>
@@ -11181,6 +11390,7 @@
           <a:lstStyle/>
           <a:p>
             <a:pPr algn="ctr"/>
+            <a:endParaRPr/>
           </a:p>
         </p:txBody>
       </p:sp>
@@ -11268,6 +11478,7 @@
           <a:lstStyle/>
           <a:p>
             <a:pPr algn="ctr"/>
+            <a:endParaRPr/>
           </a:p>
         </p:txBody>
       </p:sp>
@@ -11355,6 +11566,7 @@
           <a:lstStyle/>
           <a:p>
             <a:pPr algn="ctr"/>
+            <a:endParaRPr/>
           </a:p>
         </p:txBody>
       </p:sp>
@@ -11446,6 +11658,7 @@
           <a:lstStyle/>
           <a:p>
             <a:pPr algn="ctr"/>
+            <a:endParaRPr/>
           </a:p>
         </p:txBody>
       </p:sp>
@@ -11588,7 +11801,7 @@
 </file>
 
 <file path=ppt/slides/slide2.xml><?xml version="1.0" encoding="utf-8"?>
-<p:sld xmlns:a="http://schemas.openxmlformats.org/drawingml/2006/main" xmlns:p="http://schemas.openxmlformats.org/presentationml/2006/main" xmlns:r="http://schemas.openxmlformats.org/officeDocument/2006/relationships">
+<p:sld xmlns:a="http://schemas.openxmlformats.org/drawingml/2006/main" xmlns:r="http://schemas.openxmlformats.org/officeDocument/2006/relationships" xmlns:p="http://schemas.openxmlformats.org/presentationml/2006/main">
   <p:cSld>
     <p:bg>
       <p:bgPr>
@@ -11604,7 +11817,14 @@
         <p:cNvGrpSpPr/>
         <p:nvPr/>
       </p:nvGrpSpPr>
-      <p:grpSpPr/>
+      <p:grpSpPr>
+        <a:xfrm>
+          <a:off x="0" y="0"/>
+          <a:ext cx="0" cy="0"/>
+          <a:chOff x="0" y="0"/>
+          <a:chExt cx="0" cy="0"/>
+        </a:xfrm>
+      </p:grpSpPr>
       <p:sp>
         <p:nvSpPr>
           <p:cNvPr id="2" name="Rectangle 1"/>
@@ -11645,6 +11865,7 @@
           <a:lstStyle/>
           <a:p>
             <a:pPr algn="ctr"/>
+            <a:endParaRPr/>
           </a:p>
         </p:txBody>
       </p:sp>
@@ -11786,48 +12007,6 @@
       </p:sp>
       <p:sp>
         <p:nvSpPr>
-          <p:cNvPr id="6" name="TextBox 5"/>
-          <p:cNvSpPr txBox="1"/>
-          <p:nvPr/>
-        </p:nvSpPr>
-        <p:spPr>
-          <a:xfrm>
-            <a:off x="10180015" y="320040"/>
-            <a:ext cx="1645920" cy="365760"/>
-          </a:xfrm>
-          <a:prstGeom prst="rect">
-            <a:avLst/>
-          </a:prstGeom>
-          <a:noFill/>
-        </p:spPr>
-        <p:txBody>
-          <a:bodyPr wrap="square">
-            <a:spAutoFit/>
-          </a:bodyPr>
-          <a:lstStyle/>
-          <a:p>
-            <a:pPr algn="r">
-              <a:lnSpc>
-                <a:spcPts val="1320"/>
-              </a:lnSpc>
-              <a:spcAft>
-                <a:spcPts val="400"/>
-              </a:spcAft>
-              <a:defRPr sz="1100" b="0" i="1">
-                <a:solidFill>
-                  <a:srgbClr val="AABBDD"/>
-                </a:solidFill>
-                <a:latin typeface="Calibri"/>
-              </a:defRPr>
-            </a:pPr>
-            <a:r>
-              <a:t>1 min 30</a:t>
-            </a:r>
-          </a:p>
-        </p:txBody>
-      </p:sp>
-      <p:sp>
-        <p:nvSpPr>
           <p:cNvPr id="7" name="TextBox 6"/>
           <p:cNvSpPr txBox="1"/>
           <p:nvPr/>
@@ -11877,7 +12056,7 @@
         <p:spPr>
           <a:xfrm>
             <a:off x="731520" y="2011680"/>
-            <a:ext cx="5760720" cy="3200400"/>
+            <a:ext cx="5760720" cy="2541337"/>
           </a:xfrm>
           <a:prstGeom prst="rect">
             <a:avLst/>
@@ -11905,7 +12084,40 @@
               </a:defRPr>
             </a:pPr>
             <a:r>
-              <a:t>   Commande simulee du Ministere des Solidarites et de la Sante</a:t>
+              <a:rPr dirty="0"/>
+              <a:t>   </a:t>
+            </a:r>
+            <a:r>
+              <a:rPr dirty="0" err="1"/>
+              <a:t>Commande</a:t>
+            </a:r>
+            <a:r>
+              <a:rPr dirty="0"/>
+              <a:t> simul</a:t>
+            </a:r>
+            <a:r>
+              <a:rPr lang="fr-FR" dirty="0"/>
+              <a:t>é</a:t>
+            </a:r>
+            <a:r>
+              <a:rPr dirty="0"/>
+              <a:t>e du </a:t>
+            </a:r>
+            <a:r>
+              <a:rPr dirty="0" err="1"/>
+              <a:t>Ministere</a:t>
+            </a:r>
+            <a:r>
+              <a:rPr dirty="0"/>
+              <a:t> des </a:t>
+            </a:r>
+            <a:r>
+              <a:rPr dirty="0" err="1"/>
+              <a:t>Solidarites</a:t>
+            </a:r>
+            <a:r>
+              <a:rPr dirty="0"/>
+              <a:t> et de la Sante</a:t>
             </a:r>
           </a:p>
           <a:p>
@@ -11924,7 +12136,48 @@
               </a:defRPr>
             </a:pPr>
             <a:r>
-              <a:t>   Constat : la qualite de nos relations est un levier majeur de bien-etre (Maslow)</a:t>
+              <a:rPr dirty="0"/>
+              <a:t>   Constat : la </a:t>
+            </a:r>
+            <a:r>
+              <a:rPr dirty="0" err="1"/>
+              <a:t>qualit</a:t>
+            </a:r>
+            <a:r>
+              <a:rPr lang="fr-FR" dirty="0"/>
+              <a:t>é</a:t>
+            </a:r>
+            <a:r>
+              <a:rPr dirty="0"/>
+              <a:t> de </a:t>
+            </a:r>
+            <a:r>
+              <a:rPr dirty="0" err="1"/>
+              <a:t>nos</a:t>
+            </a:r>
+            <a:r>
+              <a:rPr dirty="0"/>
+              <a:t> relations est un levier </a:t>
+            </a:r>
+            <a:r>
+              <a:rPr dirty="0" err="1"/>
+              <a:t>majeur</a:t>
+            </a:r>
+            <a:r>
+              <a:rPr dirty="0"/>
+              <a:t> de bien-</a:t>
+            </a:r>
+            <a:r>
+              <a:rPr lang="fr-FR" dirty="0"/>
+              <a:t>ê</a:t>
+            </a:r>
+            <a:r>
+              <a:rPr dirty="0" err="1"/>
+              <a:t>tre</a:t>
+            </a:r>
+            <a:r>
+              <a:rPr dirty="0"/>
+              <a:t> (Maslow)</a:t>
             </a:r>
           </a:p>
           <a:p>
@@ -11943,7 +12196,32 @@
               </a:defRPr>
             </a:pPr>
             <a:r>
-              <a:t>   Objectif : plateforme de ressources pour tous les types de relations</a:t>
+              <a:rPr dirty="0"/>
+              <a:t>   Objectif : </a:t>
+            </a:r>
+            <a:r>
+              <a:rPr dirty="0" err="1"/>
+              <a:t>plateforme</a:t>
+            </a:r>
+            <a:r>
+              <a:rPr dirty="0"/>
+              <a:t> de </a:t>
+            </a:r>
+            <a:r>
+              <a:rPr dirty="0" err="1"/>
+              <a:t>ressources</a:t>
+            </a:r>
+            <a:r>
+              <a:rPr dirty="0"/>
+              <a:t> pour </a:t>
+            </a:r>
+            <a:r>
+              <a:rPr dirty="0" err="1"/>
+              <a:t>tous</a:t>
+            </a:r>
+            <a:r>
+              <a:rPr dirty="0"/>
+              <a:t> les types de relations</a:t>
             </a:r>
           </a:p>
           <a:p>
@@ -11962,8 +12240,46 @@
               </a:defRPr>
             </a:pPr>
             <a:r>
-              <a:t>   Cible : couple, famille, amis, collegues — tous les citoyens</a:t>
-            </a:r>
+              <a:rPr dirty="0"/>
+              <a:t>   </a:t>
+            </a:r>
+            <a:r>
+              <a:rPr dirty="0" err="1"/>
+              <a:t>Cible</a:t>
+            </a:r>
+            <a:r>
+              <a:rPr dirty="0"/>
+              <a:t> : couple, famille, </a:t>
+            </a:r>
+            <a:r>
+              <a:rPr dirty="0" err="1"/>
+              <a:t>amis</a:t>
+            </a:r>
+            <a:r>
+              <a:rPr dirty="0"/>
+              <a:t>, </a:t>
+            </a:r>
+            <a:r>
+              <a:rPr dirty="0" err="1"/>
+              <a:t>collegues</a:t>
+            </a:r>
+            <a:r>
+              <a:rPr dirty="0"/>
+              <a:t> — </a:t>
+            </a:r>
+            <a:r>
+              <a:rPr dirty="0" err="1"/>
+              <a:t>tous</a:t>
+            </a:r>
+            <a:r>
+              <a:rPr dirty="0"/>
+              <a:t> les </a:t>
+            </a:r>
+            <a:r>
+              <a:rPr dirty="0" err="1"/>
+              <a:t>citoyens</a:t>
+            </a:r>
+            <a:endParaRPr dirty="0"/>
           </a:p>
           <a:p>
             <a:pPr>
@@ -11981,70 +12297,36 @@
               </a:defRPr>
             </a:pPr>
             <a:r>
-              <a:t>   Fonctionnalites : consultation, creation, echanges moderes, progression</a:t>
-            </a:r>
-          </a:p>
-        </p:txBody>
-      </p:sp>
-      <p:sp>
-        <p:nvSpPr>
-          <p:cNvPr id="9" name="Rectangle 8"/>
-          <p:cNvSpPr/>
-          <p:nvPr/>
-        </p:nvSpPr>
-        <p:spPr>
-          <a:xfrm>
-            <a:off x="7132320" y="1371600"/>
-            <a:ext cx="4389120" cy="3200400"/>
-          </a:xfrm>
-          <a:prstGeom prst="rect">
-            <a:avLst/>
-          </a:prstGeom>
-          <a:solidFill>
-            <a:srgbClr val="F5F5F5"/>
-          </a:solidFill>
-          <a:ln w="19050">
-            <a:solidFill>
-              <a:srgbClr val="BBBBBB"/>
-            </a:solidFill>
-            <a:prstDash val="dash"/>
-          </a:ln>
-        </p:spPr>
-        <p:style>
-          <a:lnRef idx="1">
-            <a:schemeClr val="accent1"/>
-          </a:lnRef>
-          <a:fillRef idx="3">
-            <a:schemeClr val="accent1"/>
-          </a:fillRef>
-          <a:effectRef idx="2">
-            <a:schemeClr val="accent1"/>
-          </a:effectRef>
-          <a:fontRef idx="minor">
-            <a:schemeClr val="lt1"/>
-          </a:fontRef>
-        </p:style>
-        <p:txBody>
-          <a:bodyPr rtlCol="0" anchor="ctr" wrap="square"/>
-          <a:lstStyle/>
-          <a:p>
-            <a:pPr algn="ctr">
-              <a:defRPr sz="1200" i="1">
-                <a:solidFill>
-                  <a:srgbClr val="666666"/>
-                </a:solidFill>
-              </a:defRPr>
-            </a:pPr>
-            <a:r>
-              <a:t>[IMAGE A INSERER]</a:t>
-            </a:r>
-            <a:br/>
-            <a:r>
-              <a:t>Pyramide de Maslow</a:t>
-            </a:r>
-            <a:br/>
-            <a:r>
-              <a:t>(schema simplifie)</a:t>
+              <a:rPr dirty="0"/>
+              <a:t>   </a:t>
+            </a:r>
+            <a:r>
+              <a:rPr dirty="0" err="1"/>
+              <a:t>Fonctionnalit</a:t>
+            </a:r>
+            <a:r>
+              <a:rPr lang="fr-FR" dirty="0"/>
+              <a:t>é</a:t>
+            </a:r>
+            <a:r>
+              <a:rPr dirty="0"/>
+              <a:t>s : consultation, creation, </a:t>
+            </a:r>
+            <a:r>
+              <a:rPr dirty="0" err="1"/>
+              <a:t>echanges</a:t>
+            </a:r>
+            <a:r>
+              <a:rPr dirty="0"/>
+              <a:t> </a:t>
+            </a:r>
+            <a:r>
+              <a:rPr dirty="0" err="1"/>
+              <a:t>moderes</a:t>
+            </a:r>
+            <a:r>
+              <a:rPr dirty="0"/>
+              <a:t>, progression</a:t>
             </a:r>
           </a:p>
         </p:txBody>
@@ -12089,6 +12371,7 @@
           <a:lstStyle/>
           <a:p>
             <a:pPr algn="ctr"/>
+            <a:endParaRPr/>
           </a:p>
         </p:txBody>
       </p:sp>
@@ -12176,6 +12459,42 @@
           </a:p>
         </p:txBody>
       </p:sp>
+      <p:pic>
+        <p:nvPicPr>
+          <p:cNvPr id="14" name="Graphique 13">
+            <a:extLst>
+              <a:ext uri="{FF2B5EF4-FFF2-40B4-BE49-F238E27FC236}">
+                <a16:creationId xmlns:a16="http://schemas.microsoft.com/office/drawing/2014/main" id="{2CDDA8D3-0E07-E1F9-6272-87C247F72518}"/>
+              </a:ext>
+            </a:extLst>
+          </p:cNvPr>
+          <p:cNvPicPr>
+            <a:picLocks noChangeAspect="1"/>
+          </p:cNvPicPr>
+          <p:nvPr/>
+        </p:nvPicPr>
+        <p:blipFill>
+          <a:blip>
+            <a:extLst>
+              <a:ext uri="{96DAC541-7B7A-43D3-8B79-37D633B846F1}">
+                <asvg:svgBlip xmlns:asvg="http://schemas.microsoft.com/office/drawing/2016/SVG/main" r:embed="rId2"/>
+              </a:ext>
+            </a:extLst>
+          </a:blip>
+          <a:stretch>
+            <a:fillRect/>
+          </a:stretch>
+        </p:blipFill>
+        <p:spPr>
+          <a:xfrm>
+            <a:off x="6095847" y="822960"/>
+            <a:ext cx="6477000" cy="3638550"/>
+          </a:xfrm>
+          <a:prstGeom prst="rect">
+            <a:avLst/>
+          </a:prstGeom>
+        </p:spPr>
+      </p:pic>
     </p:spTree>
   </p:cSld>
   <p:clrMapOvr>
@@ -12185,7 +12504,7 @@
 </file>
 
 <file path=ppt/slides/slide3.xml><?xml version="1.0" encoding="utf-8"?>
-<p:sld xmlns:a="http://schemas.openxmlformats.org/drawingml/2006/main" xmlns:p="http://schemas.openxmlformats.org/presentationml/2006/main" xmlns:r="http://schemas.openxmlformats.org/officeDocument/2006/relationships">
+<p:sld xmlns:a="http://schemas.openxmlformats.org/drawingml/2006/main" xmlns:r="http://schemas.openxmlformats.org/officeDocument/2006/relationships" xmlns:p="http://schemas.openxmlformats.org/presentationml/2006/main">
   <p:cSld>
     <p:bg>
       <p:bgPr>
@@ -12201,7 +12520,14 @@
         <p:cNvGrpSpPr/>
         <p:nvPr/>
       </p:nvGrpSpPr>
-      <p:grpSpPr/>
+      <p:grpSpPr>
+        <a:xfrm>
+          <a:off x="0" y="0"/>
+          <a:ext cx="0" cy="0"/>
+          <a:chOff x="0" y="0"/>
+          <a:chExt cx="0" cy="0"/>
+        </a:xfrm>
+      </p:grpSpPr>
       <p:sp>
         <p:nvSpPr>
           <p:cNvPr id="2" name="Rectangle 1"/>
@@ -12242,6 +12568,7 @@
           <a:lstStyle/>
           <a:p>
             <a:pPr algn="ctr"/>
+            <a:endParaRPr/>
           </a:p>
         </p:txBody>
       </p:sp>
@@ -12377,121 +12704,6 @@
             </a:pPr>
             <a:r>
               <a:t>Diagramme de cas d'utilisation</a:t>
-            </a:r>
-          </a:p>
-        </p:txBody>
-      </p:sp>
-      <p:sp>
-        <p:nvSpPr>
-          <p:cNvPr id="6" name="TextBox 5"/>
-          <p:cNvSpPr txBox="1"/>
-          <p:nvPr/>
-        </p:nvSpPr>
-        <p:spPr>
-          <a:xfrm>
-            <a:off x="10180015" y="320040"/>
-            <a:ext cx="1645920" cy="365760"/>
-          </a:xfrm>
-          <a:prstGeom prst="rect">
-            <a:avLst/>
-          </a:prstGeom>
-          <a:noFill/>
-        </p:spPr>
-        <p:txBody>
-          <a:bodyPr wrap="square">
-            <a:spAutoFit/>
-          </a:bodyPr>
-          <a:lstStyle/>
-          <a:p>
-            <a:pPr algn="r">
-              <a:lnSpc>
-                <a:spcPts val="1320"/>
-              </a:lnSpc>
-              <a:spcAft>
-                <a:spcPts val="400"/>
-              </a:spcAft>
-              <a:defRPr sz="1100" b="0" i="1">
-                <a:solidFill>
-                  <a:srgbClr val="AABBDD"/>
-                </a:solidFill>
-                <a:latin typeface="Calibri"/>
-              </a:defRPr>
-            </a:pPr>
-            <a:r>
-              <a:t>1 min 30</a:t>
-            </a:r>
-          </a:p>
-        </p:txBody>
-      </p:sp>
-      <p:sp>
-        <p:nvSpPr>
-          <p:cNvPr id="7" name="Rectangle 6"/>
-          <p:cNvSpPr/>
-          <p:nvPr/>
-        </p:nvSpPr>
-        <p:spPr>
-          <a:xfrm>
-            <a:off x="548640" y="1280160"/>
-            <a:ext cx="6858000" cy="4846320"/>
-          </a:xfrm>
-          <a:prstGeom prst="rect">
-            <a:avLst/>
-          </a:prstGeom>
-          <a:solidFill>
-            <a:srgbClr val="F5F5F5"/>
-          </a:solidFill>
-          <a:ln w="19050">
-            <a:solidFill>
-              <a:srgbClr val="BBBBBB"/>
-            </a:solidFill>
-            <a:prstDash val="dash"/>
-          </a:ln>
-        </p:spPr>
-        <p:style>
-          <a:lnRef idx="1">
-            <a:schemeClr val="accent1"/>
-          </a:lnRef>
-          <a:fillRef idx="3">
-            <a:schemeClr val="accent1"/>
-          </a:fillRef>
-          <a:effectRef idx="2">
-            <a:schemeClr val="accent1"/>
-          </a:effectRef>
-          <a:fontRef idx="minor">
-            <a:schemeClr val="lt1"/>
-          </a:fontRef>
-        </p:style>
-        <p:txBody>
-          <a:bodyPr rtlCol="0" anchor="ctr" wrap="square"/>
-          <a:lstStyle/>
-          <a:p>
-            <a:pPr algn="ctr">
-              <a:defRPr sz="1200" i="1">
-                <a:solidFill>
-                  <a:srgbClr val="666666"/>
-                </a:solidFill>
-              </a:defRPr>
-            </a:pPr>
-            <a:r>
-              <a:t>[IMAGE A INSERER]</a:t>
-            </a:r>
-            <a:br/>
-            <a:r>
-              <a:t>Diagramme de cas d'utilisation UML</a:t>
-            </a:r>
-            <a:br/>
-            <a:br/>
-            <a:r>
-              <a:t>5 acteurs : Citoyen non connecte, Citoyen connecte,</a:t>
-            </a:r>
-            <a:br/>
-            <a:r>
-              <a:t>Moderateur, Administrateur, Super-admin</a:t>
-            </a:r>
-            <a:br/>
-            <a:br/>
-            <a:r>
-              <a:t>(draw.io / PlantUML / StarUML)</a:t>
             </a:r>
           </a:p>
         </p:txBody>
@@ -12538,6 +12750,7 @@
           <a:lstStyle/>
           <a:p>
             <a:pPr algn="ctr"/>
+            <a:endParaRPr/>
           </a:p>
         </p:txBody>
       </p:sp>
@@ -12634,7 +12847,7 @@
         <p:spPr>
           <a:xfrm>
             <a:off x="8046720" y="1965960"/>
-            <a:ext cx="3291840" cy="228600"/>
+            <a:ext cx="3291840" cy="286873"/>
           </a:xfrm>
           <a:prstGeom prst="rect">
             <a:avLst/>
@@ -12662,8 +12875,38 @@
               </a:defRPr>
             </a:pPr>
             <a:r>
-              <a:t>Consulte, cree, commente, favoris</a:t>
-            </a:r>
+              <a:rPr dirty="0" err="1"/>
+              <a:t>Consulte</a:t>
+            </a:r>
+            <a:r>
+              <a:rPr dirty="0"/>
+              <a:t>, </a:t>
+            </a:r>
+            <a:r>
+              <a:rPr dirty="0" err="1"/>
+              <a:t>cr</a:t>
+            </a:r>
+            <a:r>
+              <a:rPr lang="fr-FR" dirty="0"/>
+              <a:t>é</a:t>
+            </a:r>
+            <a:r>
+              <a:rPr dirty="0"/>
+              <a:t>e, comment</a:t>
+            </a:r>
+            <a:r>
+              <a:rPr lang="fr-FR" dirty="0"/>
+              <a:t>é</a:t>
+            </a:r>
+            <a:r>
+              <a:rPr dirty="0"/>
+              <a:t>, </a:t>
+            </a:r>
+            <a:r>
+              <a:rPr dirty="0" err="1"/>
+              <a:t>favoris</a:t>
+            </a:r>
+            <a:endParaRPr dirty="0"/>
           </a:p>
         </p:txBody>
       </p:sp>
@@ -12709,6 +12952,7 @@
           <a:lstStyle/>
           <a:p>
             <a:pPr algn="ctr"/>
+            <a:endParaRPr/>
           </a:p>
         </p:txBody>
       </p:sp>
@@ -12880,6 +13124,7 @@
           <a:lstStyle/>
           <a:p>
             <a:pPr algn="ctr"/>
+            <a:endParaRPr/>
           </a:p>
         </p:txBody>
       </p:sp>
@@ -13051,6 +13296,7 @@
           <a:lstStyle/>
           <a:p>
             <a:pPr algn="ctr"/>
+            <a:endParaRPr/>
           </a:p>
         </p:txBody>
       </p:sp>
@@ -13147,7 +13393,7 @@
         <p:spPr>
           <a:xfrm>
             <a:off x="8046720" y="5120640"/>
-            <a:ext cx="3291840" cy="228600"/>
+            <a:ext cx="3291840" cy="286873"/>
           </a:xfrm>
           <a:prstGeom prst="rect">
             <a:avLst/>
@@ -13175,7 +13421,36 @@
               </a:defRPr>
             </a:pPr>
             <a:r>
-              <a:t>Cree comptes privilegies</a:t>
+              <a:rPr dirty="0"/>
+              <a:t>Cr</a:t>
+            </a:r>
+            <a:r>
+              <a:rPr lang="fr-FR" dirty="0"/>
+              <a:t>é</a:t>
+            </a:r>
+            <a:r>
+              <a:rPr dirty="0"/>
+              <a:t>e </a:t>
+            </a:r>
+            <a:r>
+              <a:rPr dirty="0" err="1"/>
+              <a:t>comptes</a:t>
+            </a:r>
+            <a:r>
+              <a:rPr dirty="0"/>
+              <a:t> </a:t>
+            </a:r>
+            <a:r>
+              <a:rPr dirty="0" err="1"/>
+              <a:t>privilegi</a:t>
+            </a:r>
+            <a:r>
+              <a:rPr lang="fr-FR" dirty="0"/>
+              <a:t>é</a:t>
+            </a:r>
+            <a:r>
+              <a:rPr dirty="0"/>
+              <a:t>s</a:t>
             </a:r>
           </a:p>
         </p:txBody>
@@ -13222,6 +13497,36 @@
           </a:p>
         </p:txBody>
       </p:sp>
+      <p:pic>
+        <p:nvPicPr>
+          <p:cNvPr id="26" name="Image 25">
+            <a:extLst>
+              <a:ext uri="{FF2B5EF4-FFF2-40B4-BE49-F238E27FC236}">
+                <a16:creationId xmlns:a16="http://schemas.microsoft.com/office/drawing/2014/main" id="{E6876D4B-B10B-CA51-16B4-76167C9F4077}"/>
+              </a:ext>
+            </a:extLst>
+          </p:cNvPr>
+          <p:cNvPicPr>
+            <a:picLocks noChangeAspect="1"/>
+          </p:cNvPicPr>
+          <p:nvPr/>
+        </p:nvPicPr>
+        <p:blipFill>
+          <a:blip r:embed="rId2"/>
+          <a:stretch>
+            <a:fillRect/>
+          </a:stretch>
+        </p:blipFill>
+        <p:spPr>
+          <a:xfrm>
+            <a:off x="265063" y="1463040"/>
+            <a:ext cx="7233017" cy="4846320"/>
+          </a:xfrm>
+          <a:prstGeom prst="rect">
+            <a:avLst/>
+          </a:prstGeom>
+        </p:spPr>
+      </p:pic>
     </p:spTree>
   </p:cSld>
   <p:clrMapOvr>
@@ -13231,7 +13536,7 @@
 </file>
 
 <file path=ppt/slides/slide4.xml><?xml version="1.0" encoding="utf-8"?>
-<p:sld xmlns:a="http://schemas.openxmlformats.org/drawingml/2006/main" xmlns:p="http://schemas.openxmlformats.org/presentationml/2006/main" xmlns:r="http://schemas.openxmlformats.org/officeDocument/2006/relationships">
+<p:sld xmlns:a="http://schemas.openxmlformats.org/drawingml/2006/main" xmlns:r="http://schemas.openxmlformats.org/officeDocument/2006/relationships" xmlns:p="http://schemas.openxmlformats.org/presentationml/2006/main">
   <p:cSld>
     <p:bg>
       <p:bgPr>
@@ -13247,7 +13552,14 @@
         <p:cNvGrpSpPr/>
         <p:nvPr/>
       </p:nvGrpSpPr>
-      <p:grpSpPr/>
+      <p:grpSpPr>
+        <a:xfrm>
+          <a:off x="0" y="0"/>
+          <a:ext cx="0" cy="0"/>
+          <a:chOff x="0" y="0"/>
+          <a:chExt cx="0" cy="0"/>
+        </a:xfrm>
+      </p:grpSpPr>
       <p:sp>
         <p:nvSpPr>
           <p:cNvPr id="2" name="Rectangle 1"/>
@@ -13288,6 +13600,7 @@
           <a:lstStyle/>
           <a:p>
             <a:pPr algn="ctr"/>
+            <a:endParaRPr/>
           </a:p>
         </p:txBody>
       </p:sp>
@@ -13429,236 +13742,102 @@
       </p:sp>
       <p:sp>
         <p:nvSpPr>
-          <p:cNvPr id="6" name="TextBox 5"/>
-          <p:cNvSpPr txBox="1"/>
-          <p:nvPr/>
-        </p:nvSpPr>
-        <p:spPr>
-          <a:xfrm>
-            <a:off x="10180015" y="320040"/>
-            <a:ext cx="1645920" cy="365760"/>
-          </a:xfrm>
-          <a:prstGeom prst="rect">
-            <a:avLst/>
-          </a:prstGeom>
-          <a:noFill/>
-        </p:spPr>
-        <p:txBody>
-          <a:bodyPr wrap="square">
-            <a:spAutoFit/>
-          </a:bodyPr>
-          <a:lstStyle/>
-          <a:p>
-            <a:pPr algn="r">
-              <a:lnSpc>
-                <a:spcPts val="1320"/>
-              </a:lnSpc>
-              <a:spcAft>
-                <a:spcPts val="400"/>
-              </a:spcAft>
-              <a:defRPr sz="1100" b="0" i="1">
-                <a:solidFill>
-                  <a:srgbClr val="AABBDD"/>
-                </a:solidFill>
-                <a:latin typeface="Calibri"/>
-              </a:defRPr>
-            </a:pPr>
-            <a:r>
-              <a:t>1 min</a:t>
-            </a:r>
-          </a:p>
-        </p:txBody>
-      </p:sp>
-      <p:sp>
-        <p:nvSpPr>
-          <p:cNvPr id="7" name="Rectangle 6"/>
-          <p:cNvSpPr/>
-          <p:nvPr/>
-        </p:nvSpPr>
-        <p:spPr>
-          <a:xfrm>
-            <a:off x="457200" y="1371600"/>
-            <a:ext cx="5303520" cy="3840480"/>
-          </a:xfrm>
-          <a:prstGeom prst="rect">
-            <a:avLst/>
-          </a:prstGeom>
-          <a:solidFill>
-            <a:srgbClr val="F5F5F5"/>
-          </a:solidFill>
-          <a:ln w="19050">
-            <a:solidFill>
-              <a:srgbClr val="BBBBBB"/>
-            </a:solidFill>
-            <a:prstDash val="dash"/>
-          </a:ln>
-        </p:spPr>
-        <p:style>
-          <a:lnRef idx="1">
-            <a:schemeClr val="accent1"/>
-          </a:lnRef>
-          <a:fillRef idx="3">
-            <a:schemeClr val="accent1"/>
-          </a:fillRef>
-          <a:effectRef idx="2">
-            <a:schemeClr val="accent1"/>
-          </a:effectRef>
-          <a:fontRef idx="minor">
-            <a:schemeClr val="lt1"/>
-          </a:fontRef>
-        </p:style>
-        <p:txBody>
-          <a:bodyPr rtlCol="0" anchor="ctr" wrap="square"/>
+          <p:cNvPr id="9" name="TextBox 8"/>
+          <p:cNvSpPr txBox="1"/>
+          <p:nvPr/>
+        </p:nvSpPr>
+        <p:spPr>
+          <a:xfrm>
+            <a:off x="457200" y="5486400"/>
+            <a:ext cx="11247120" cy="271869"/>
+          </a:xfrm>
+          <a:prstGeom prst="rect">
+            <a:avLst/>
+          </a:prstGeom>
+          <a:noFill/>
+        </p:spPr>
+        <p:txBody>
+          <a:bodyPr wrap="square">
+            <a:spAutoFit/>
+          </a:bodyPr>
           <a:lstStyle/>
           <a:p>
             <a:pPr algn="ctr">
-              <a:defRPr sz="1200" i="1">
+              <a:lnSpc>
+                <a:spcPts val="1439"/>
+              </a:lnSpc>
+              <a:spcAft>
+                <a:spcPts val="400"/>
+              </a:spcAft>
+              <a:defRPr sz="1200" b="0" i="1">
                 <a:solidFill>
                   <a:srgbClr val="666666"/>
                 </a:solidFill>
-              </a:defRPr>
-            </a:pPr>
-            <a:r>
-              <a:t>[IMAGE A INSERER]</a:t>
-            </a:r>
-            <a:br/>
-            <a:r>
-              <a:t>Diagramme bete a cornes</a:t>
-            </a:r>
-            <a:br/>
-            <a:br/>
-            <a:r>
-              <a:t>A qui ? Citoyens, familles, couples</a:t>
-            </a:r>
-            <a:br/>
-            <a:r>
-              <a:t>Sur quoi ? Relations interpersonnelles</a:t>
-            </a:r>
-            <a:br/>
-            <a:r>
-              <a:t>Pourquoi ? Ameliorer la qualite des liens</a:t>
-            </a:r>
-          </a:p>
-        </p:txBody>
-      </p:sp>
-      <p:sp>
-        <p:nvSpPr>
-          <p:cNvPr id="8" name="Rectangle 7"/>
-          <p:cNvSpPr/>
-          <p:nvPr/>
-        </p:nvSpPr>
-        <p:spPr>
-          <a:xfrm>
-            <a:off x="6217920" y="1371600"/>
-            <a:ext cx="5303520" cy="3840480"/>
-          </a:xfrm>
-          <a:prstGeom prst="rect">
-            <a:avLst/>
-          </a:prstGeom>
-          <a:solidFill>
-            <a:srgbClr val="F5F5F5"/>
-          </a:solidFill>
-          <a:ln w="19050">
-            <a:solidFill>
-              <a:srgbClr val="BBBBBB"/>
-            </a:solidFill>
-            <a:prstDash val="dash"/>
-          </a:ln>
-        </p:spPr>
-        <p:style>
-          <a:lnRef idx="1">
-            <a:schemeClr val="accent1"/>
-          </a:lnRef>
-          <a:fillRef idx="3">
-            <a:schemeClr val="accent1"/>
-          </a:fillRef>
-          <a:effectRef idx="2">
-            <a:schemeClr val="accent1"/>
-          </a:effectRef>
-          <a:fontRef idx="minor">
-            <a:schemeClr val="lt1"/>
-          </a:fontRef>
-        </p:style>
-        <p:txBody>
-          <a:bodyPr rtlCol="0" anchor="ctr" wrap="square"/>
-          <a:lstStyle/>
-          <a:p>
-            <a:pPr algn="ctr">
-              <a:defRPr sz="1200" i="1">
-                <a:solidFill>
-                  <a:srgbClr val="666666"/>
-                </a:solidFill>
-              </a:defRPr>
-            </a:pPr>
-            <a:r>
-              <a:t>[IMAGE A INSERER]</a:t>
-            </a:r>
-            <a:br/>
-            <a:r>
-              <a:t>Diagramme pieuvre</a:t>
-            </a:r>
-            <a:br/>
-            <a:br/>
-            <a:r>
-              <a:t>FP1 : Acces web aux ressources</a:t>
-            </a:r>
-            <a:br/>
-            <a:r>
-              <a:t>FP2 : Acces mobile</a:t>
-            </a:r>
-            <a:br/>
-            <a:r>
-              <a:t>FC1 : RGPD / RGAA</a:t>
-            </a:r>
-            <a:br/>
-            <a:r>
-              <a:t>FC2 : Performance</a:t>
-            </a:r>
-            <a:br/>
-            <a:r>
-              <a:t>FC3 : Navigateurs</a:t>
-            </a:r>
-          </a:p>
-        </p:txBody>
-      </p:sp>
-      <p:sp>
-        <p:nvSpPr>
-          <p:cNvPr id="9" name="TextBox 8"/>
-          <p:cNvSpPr txBox="1"/>
-          <p:nvPr/>
-        </p:nvSpPr>
-        <p:spPr>
-          <a:xfrm>
-            <a:off x="457200" y="5486400"/>
-            <a:ext cx="11247120" cy="640080"/>
-          </a:xfrm>
-          <a:prstGeom prst="rect">
-            <a:avLst/>
-          </a:prstGeom>
-          <a:noFill/>
-        </p:spPr>
-        <p:txBody>
-          <a:bodyPr wrap="square">
-            <a:spAutoFit/>
-          </a:bodyPr>
-          <a:lstStyle/>
-          <a:p>
-            <a:pPr algn="ctr">
-              <a:lnSpc>
-                <a:spcPts val="1439"/>
-              </a:lnSpc>
-              <a:spcAft>
-                <a:spcPts val="400"/>
-              </a:spcAft>
-              <a:defRPr sz="1200" b="0" i="1">
-                <a:solidFill>
-                  <a:srgbClr val="666666"/>
-                </a:solidFill>
-                <a:latin typeface="Calibri"/>
-              </a:defRPr>
-            </a:pPr>
-            <a:r>
-              <a:t>FP = Fonction Principale    |    FC = Fonction Contrainte    |    Les deux diagrammes ont ete realises conformement au CCTP</a:t>
+                <a:latin typeface="Calibri"/>
+              </a:defRPr>
+            </a:pPr>
+            <a:r>
+              <a:t>F </a:t>
+            </a:r>
+            <a:r>
+              <a:rPr dirty="0"/>
+              <a:t>= </a:t>
+            </a:r>
+            <a:r>
+              <a:rPr dirty="0" err="1"/>
+              <a:t>Fonction</a:t>
+            </a:r>
+            <a:r>
+              <a:rPr dirty="0"/>
+              <a:t> </a:t>
+            </a:r>
+            <a:r>
+              <a:rPr dirty="0" err="1"/>
+              <a:t>Contrainte</a:t>
+            </a:r>
+            <a:r>
+              <a:rPr dirty="0"/>
+              <a:t>    |    Les deux </a:t>
+            </a:r>
+            <a:r>
+              <a:rPr dirty="0" err="1"/>
+              <a:t>diagrammes</a:t>
+            </a:r>
+            <a:r>
+              <a:rPr dirty="0"/>
+              <a:t> </a:t>
+            </a:r>
+            <a:r>
+              <a:rPr dirty="0" err="1"/>
+              <a:t>ont</a:t>
+            </a:r>
+            <a:r>
+              <a:rPr dirty="0"/>
+              <a:t> </a:t>
+            </a:r>
+            <a:r>
+              <a:rPr dirty="0" err="1"/>
+              <a:t>ete</a:t>
+            </a:r>
+            <a:r>
+              <a:rPr dirty="0"/>
+              <a:t> </a:t>
+            </a:r>
+            <a:r>
+              <a:rPr dirty="0" err="1"/>
+              <a:t>realises</a:t>
+            </a:r>
+            <a:r>
+              <a:rPr dirty="0"/>
+              <a:t> </a:t>
+            </a:r>
+            <a:r>
+              <a:rPr dirty="0" err="1"/>
+              <a:t>conformement</a:t>
+            </a:r>
+            <a:r>
+              <a:rPr dirty="0"/>
+              <a:t> au CCTP</a:t>
             </a:r>
           </a:p>
         </p:txBody>
@@ -13705,6 +13884,66 @@
           </a:p>
         </p:txBody>
       </p:sp>
+      <p:pic>
+        <p:nvPicPr>
+          <p:cNvPr id="12" name="Image 11">
+            <a:extLst>
+              <a:ext uri="{FF2B5EF4-FFF2-40B4-BE49-F238E27FC236}">
+                <a16:creationId xmlns:a16="http://schemas.microsoft.com/office/drawing/2014/main" id="{08946511-EED7-1A74-6072-7BAC239BA6D4}"/>
+              </a:ext>
+            </a:extLst>
+          </p:cNvPr>
+          <p:cNvPicPr>
+            <a:picLocks noChangeAspect="1"/>
+          </p:cNvPicPr>
+          <p:nvPr/>
+        </p:nvPicPr>
+        <p:blipFill>
+          <a:blip r:embed="rId2"/>
+          <a:stretch>
+            <a:fillRect/>
+          </a:stretch>
+        </p:blipFill>
+        <p:spPr>
+          <a:xfrm>
+            <a:off x="1051560" y="1463040"/>
+            <a:ext cx="3223260" cy="4024688"/>
+          </a:xfrm>
+          <a:prstGeom prst="rect">
+            <a:avLst/>
+          </a:prstGeom>
+        </p:spPr>
+      </p:pic>
+      <p:pic>
+        <p:nvPicPr>
+          <p:cNvPr id="14" name="Image 13">
+            <a:extLst>
+              <a:ext uri="{FF2B5EF4-FFF2-40B4-BE49-F238E27FC236}">
+                <a16:creationId xmlns:a16="http://schemas.microsoft.com/office/drawing/2014/main" id="{5B8216B5-3A70-307A-AB6C-5335115351AD}"/>
+              </a:ext>
+            </a:extLst>
+          </p:cNvPr>
+          <p:cNvPicPr>
+            <a:picLocks noChangeAspect="1"/>
+          </p:cNvPicPr>
+          <p:nvPr/>
+        </p:nvPicPr>
+        <p:blipFill>
+          <a:blip r:embed="rId3"/>
+          <a:stretch>
+            <a:fillRect/>
+          </a:stretch>
+        </p:blipFill>
+        <p:spPr>
+          <a:xfrm>
+            <a:off x="4619815" y="1249367"/>
+            <a:ext cx="7084505" cy="4039225"/>
+          </a:xfrm>
+          <a:prstGeom prst="rect">
+            <a:avLst/>
+          </a:prstGeom>
+        </p:spPr>
+      </p:pic>
     </p:spTree>
   </p:cSld>
   <p:clrMapOvr>
@@ -13714,7 +13953,7 @@
 </file>
 
 <file path=ppt/slides/slide5.xml><?xml version="1.0" encoding="utf-8"?>
-<p:sld xmlns:a="http://schemas.openxmlformats.org/drawingml/2006/main" xmlns:p="http://schemas.openxmlformats.org/presentationml/2006/main" xmlns:r="http://schemas.openxmlformats.org/officeDocument/2006/relationships">
+<p:sld xmlns:a="http://schemas.openxmlformats.org/drawingml/2006/main" xmlns:r="http://schemas.openxmlformats.org/officeDocument/2006/relationships" xmlns:p="http://schemas.openxmlformats.org/presentationml/2006/main">
   <p:cSld>
     <p:bg>
       <p:bgPr>
@@ -13730,7 +13969,14 @@
         <p:cNvGrpSpPr/>
         <p:nvPr/>
       </p:nvGrpSpPr>
-      <p:grpSpPr/>
+      <p:grpSpPr>
+        <a:xfrm>
+          <a:off x="0" y="0"/>
+          <a:ext cx="0" cy="0"/>
+          <a:chOff x="0" y="0"/>
+          <a:chExt cx="0" cy="0"/>
+        </a:xfrm>
+      </p:grpSpPr>
       <p:sp>
         <p:nvSpPr>
           <p:cNvPr id="2" name="Rectangle 1"/>
@@ -13771,6 +14017,7 @@
           <a:lstStyle/>
           <a:p>
             <a:pPr algn="ctr"/>
+            <a:endParaRPr/>
           </a:p>
         </p:txBody>
       </p:sp>
@@ -13912,48 +14159,6 @@
       </p:sp>
       <p:sp>
         <p:nvSpPr>
-          <p:cNvPr id="6" name="TextBox 5"/>
-          <p:cNvSpPr txBox="1"/>
-          <p:nvPr/>
-        </p:nvSpPr>
-        <p:spPr>
-          <a:xfrm>
-            <a:off x="10180015" y="320040"/>
-            <a:ext cx="1645920" cy="365760"/>
-          </a:xfrm>
-          <a:prstGeom prst="rect">
-            <a:avLst/>
-          </a:prstGeom>
-          <a:noFill/>
-        </p:spPr>
-        <p:txBody>
-          <a:bodyPr wrap="square">
-            <a:spAutoFit/>
-          </a:bodyPr>
-          <a:lstStyle/>
-          <a:p>
-            <a:pPr algn="r">
-              <a:lnSpc>
-                <a:spcPts val="1320"/>
-              </a:lnSpc>
-              <a:spcAft>
-                <a:spcPts val="400"/>
-              </a:spcAft>
-              <a:defRPr sz="1100" b="0" i="1">
-                <a:solidFill>
-                  <a:srgbClr val="AABBDD"/>
-                </a:solidFill>
-                <a:latin typeface="Calibri"/>
-              </a:defRPr>
-            </a:pPr>
-            <a:r>
-              <a:t>1 min 30</a:t>
-            </a:r>
-          </a:p>
-        </p:txBody>
-      </p:sp>
-      <p:sp>
-        <p:nvSpPr>
           <p:cNvPr id="7" name="Rectangle 6"/>
           <p:cNvSpPr/>
           <p:nvPr/>
@@ -13992,6 +14197,7 @@
           <a:lstStyle/>
           <a:p>
             <a:pPr algn="ctr"/>
+            <a:endParaRPr/>
           </a:p>
         </p:txBody>
       </p:sp>
@@ -14077,6 +14283,7 @@
           <a:lstStyle/>
           <a:p>
             <a:pPr algn="ctr"/>
+            <a:endParaRPr/>
           </a:p>
         </p:txBody>
       </p:sp>
@@ -14117,7 +14324,7 @@
               </a:defRPr>
             </a:pPr>
             <a:r>
-              <a:t>Laravel 11 (retenu)</a:t>
+              <a:t>Laravel 12 (retenu)</a:t>
             </a:r>
           </a:p>
         </p:txBody>
@@ -14162,6 +14369,7 @@
           <a:lstStyle/>
           <a:p>
             <a:pPr algn="ctr"/>
+            <a:endParaRPr/>
           </a:p>
         </p:txBody>
       </p:sp>
@@ -14247,6 +14455,7 @@
           <a:lstStyle/>
           <a:p>
             <a:pPr algn="ctr"/>
+            <a:endParaRPr/>
           </a:p>
         </p:txBody>
       </p:sp>
@@ -14332,6 +14541,7 @@
           <a:lstStyle/>
           <a:p>
             <a:pPr algn="ctr"/>
+            <a:endParaRPr/>
           </a:p>
         </p:txBody>
       </p:sp>
@@ -14417,6 +14627,7 @@
           <a:lstStyle/>
           <a:p>
             <a:pPr algn="ctr"/>
+            <a:endParaRPr/>
           </a:p>
         </p:txBody>
       </p:sp>
@@ -14502,6 +14713,7 @@
           <a:lstStyle/>
           <a:p>
             <a:pPr algn="ctr"/>
+            <a:endParaRPr/>
           </a:p>
         </p:txBody>
       </p:sp>
@@ -14587,6 +14799,7 @@
           <a:lstStyle/>
           <a:p>
             <a:pPr algn="ctr"/>
+            <a:endParaRPr/>
           </a:p>
         </p:txBody>
       </p:sp>
@@ -14672,6 +14885,7 @@
           <a:lstStyle/>
           <a:p>
             <a:pPr algn="ctr"/>
+            <a:endParaRPr/>
           </a:p>
         </p:txBody>
       </p:sp>
@@ -14757,6 +14971,7 @@
           <a:lstStyle/>
           <a:p>
             <a:pPr algn="ctr"/>
+            <a:endParaRPr/>
           </a:p>
         </p:txBody>
       </p:sp>
@@ -14842,6 +15057,7 @@
           <a:lstStyle/>
           <a:p>
             <a:pPr algn="ctr"/>
+            <a:endParaRPr/>
           </a:p>
         </p:txBody>
       </p:sp>
@@ -14927,6 +15143,7 @@
           <a:lstStyle/>
           <a:p>
             <a:pPr algn="ctr"/>
+            <a:endParaRPr/>
           </a:p>
         </p:txBody>
       </p:sp>
@@ -15012,6 +15229,7 @@
           <a:lstStyle/>
           <a:p>
             <a:pPr algn="ctr"/>
+            <a:endParaRPr/>
           </a:p>
         </p:txBody>
       </p:sp>
@@ -15097,6 +15315,7 @@
           <a:lstStyle/>
           <a:p>
             <a:pPr algn="ctr"/>
+            <a:endParaRPr/>
           </a:p>
         </p:txBody>
       </p:sp>
@@ -15182,6 +15401,7 @@
           <a:lstStyle/>
           <a:p>
             <a:pPr algn="ctr"/>
+            <a:endParaRPr/>
           </a:p>
         </p:txBody>
       </p:sp>
@@ -15267,6 +15487,7 @@
           <a:lstStyle/>
           <a:p>
             <a:pPr algn="ctr"/>
+            <a:endParaRPr/>
           </a:p>
         </p:txBody>
       </p:sp>
@@ -15352,6 +15573,7 @@
           <a:lstStyle/>
           <a:p>
             <a:pPr algn="ctr"/>
+            <a:endParaRPr/>
           </a:p>
         </p:txBody>
       </p:sp>
@@ -15437,6 +15659,7 @@
           <a:lstStyle/>
           <a:p>
             <a:pPr algn="ctr"/>
+            <a:endParaRPr/>
           </a:p>
         </p:txBody>
       </p:sp>
@@ -15522,6 +15745,7 @@
           <a:lstStyle/>
           <a:p>
             <a:pPr algn="ctr"/>
+            <a:endParaRPr/>
           </a:p>
         </p:txBody>
       </p:sp>
@@ -15607,6 +15831,7 @@
           <a:lstStyle/>
           <a:p>
             <a:pPr algn="ctr"/>
+            <a:endParaRPr/>
           </a:p>
         </p:txBody>
       </p:sp>
@@ -15692,6 +15917,7 @@
           <a:lstStyle/>
           <a:p>
             <a:pPr algn="ctr"/>
+            <a:endParaRPr/>
           </a:p>
         </p:txBody>
       </p:sp>
@@ -15777,6 +16003,7 @@
           <a:lstStyle/>
           <a:p>
             <a:pPr algn="ctr"/>
+            <a:endParaRPr/>
           </a:p>
         </p:txBody>
       </p:sp>
@@ -15862,6 +16089,7 @@
           <a:lstStyle/>
           <a:p>
             <a:pPr algn="ctr"/>
+            <a:endParaRPr/>
           </a:p>
         </p:txBody>
       </p:sp>
@@ -15947,6 +16175,7 @@
           <a:lstStyle/>
           <a:p>
             <a:pPr algn="ctr"/>
+            <a:endParaRPr/>
           </a:p>
         </p:txBody>
       </p:sp>
@@ -16034,6 +16263,7 @@
           <a:lstStyle/>
           <a:p>
             <a:pPr algn="ctr"/>
+            <a:endParaRPr/>
           </a:p>
         </p:txBody>
       </p:sp>
@@ -16209,6 +16439,7 @@
           <a:lstStyle/>
           <a:p>
             <a:pPr algn="ctr"/>
+            <a:endParaRPr/>
           </a:p>
         </p:txBody>
       </p:sp>
@@ -16384,6 +16615,7 @@
           <a:lstStyle/>
           <a:p>
             <a:pPr algn="ctr"/>
+            <a:endParaRPr/>
           </a:p>
         </p:txBody>
       </p:sp>
@@ -16568,7 +16800,7 @@
 </file>
 
 <file path=ppt/slides/slide6.xml><?xml version="1.0" encoding="utf-8"?>
-<p:sld xmlns:a="http://schemas.openxmlformats.org/drawingml/2006/main" xmlns:p="http://schemas.openxmlformats.org/presentationml/2006/main" xmlns:r="http://schemas.openxmlformats.org/officeDocument/2006/relationships">
+<p:sld xmlns:a="http://schemas.openxmlformats.org/drawingml/2006/main" xmlns:r="http://schemas.openxmlformats.org/officeDocument/2006/relationships" xmlns:p="http://schemas.openxmlformats.org/presentationml/2006/main">
   <p:cSld>
     <p:bg>
       <p:bgPr>
@@ -16584,7 +16816,14 @@
         <p:cNvGrpSpPr/>
         <p:nvPr/>
       </p:nvGrpSpPr>
-      <p:grpSpPr/>
+      <p:grpSpPr>
+        <a:xfrm>
+          <a:off x="0" y="0"/>
+          <a:ext cx="0" cy="0"/>
+          <a:chOff x="0" y="0"/>
+          <a:chExt cx="0" cy="0"/>
+        </a:xfrm>
+      </p:grpSpPr>
       <p:sp>
         <p:nvSpPr>
           <p:cNvPr id="2" name="Rectangle 1"/>
@@ -16625,6 +16864,7 @@
           <a:lstStyle/>
           <a:p>
             <a:pPr algn="ctr"/>
+            <a:endParaRPr/>
           </a:p>
         </p:txBody>
       </p:sp>
@@ -16766,48 +17006,6 @@
       </p:sp>
       <p:sp>
         <p:nvSpPr>
-          <p:cNvPr id="6" name="TextBox 5"/>
-          <p:cNvSpPr txBox="1"/>
-          <p:nvPr/>
-        </p:nvSpPr>
-        <p:spPr>
-          <a:xfrm>
-            <a:off x="10180015" y="320040"/>
-            <a:ext cx="1645920" cy="365760"/>
-          </a:xfrm>
-          <a:prstGeom prst="rect">
-            <a:avLst/>
-          </a:prstGeom>
-          <a:noFill/>
-        </p:spPr>
-        <p:txBody>
-          <a:bodyPr wrap="square">
-            <a:spAutoFit/>
-          </a:bodyPr>
-          <a:lstStyle/>
-          <a:p>
-            <a:pPr algn="r">
-              <a:lnSpc>
-                <a:spcPts val="1320"/>
-              </a:lnSpc>
-              <a:spcAft>
-                <a:spcPts val="400"/>
-              </a:spcAft>
-              <a:defRPr sz="1100" b="0" i="1">
-                <a:solidFill>
-                  <a:srgbClr val="AABBDD"/>
-                </a:solidFill>
-                <a:latin typeface="Calibri"/>
-              </a:defRPr>
-            </a:pPr>
-            <a:r>
-              <a:t>1 min 30</a:t>
-            </a:r>
-          </a:p>
-        </p:txBody>
-      </p:sp>
-      <p:sp>
-        <p:nvSpPr>
           <p:cNvPr id="7" name="TextBox 6"/>
           <p:cNvSpPr txBox="1"/>
           <p:nvPr/>
@@ -16815,7 +17013,7 @@
         <p:spPr>
           <a:xfrm>
             <a:off x="457200" y="1143000"/>
-            <a:ext cx="11247120" cy="320040"/>
+            <a:ext cx="11247120" cy="271869"/>
           </a:xfrm>
           <a:prstGeom prst="rect">
             <a:avLst/>
@@ -16843,8 +17041,30 @@
               </a:defRPr>
             </a:pPr>
             <a:r>
-              <a:t>Evaluation multi-criteres sur les 3 couches principales de l'application</a:t>
-            </a:r>
+              <a:rPr dirty="0"/>
+              <a:t>Evaluation multi-crit</a:t>
+            </a:r>
+            <a:r>
+              <a:rPr lang="fr-FR" dirty="0"/>
+              <a:t>è</a:t>
+            </a:r>
+            <a:r>
+              <a:rPr dirty="0"/>
+              <a:t>res sur les 3 couches </a:t>
+            </a:r>
+            <a:r>
+              <a:rPr dirty="0" err="1"/>
+              <a:t>principales</a:t>
+            </a:r>
+            <a:r>
+              <a:rPr dirty="0"/>
+              <a:t> de </a:t>
+            </a:r>
+            <a:r>
+              <a:rPr dirty="0" err="1"/>
+              <a:t>l'application</a:t>
+            </a:r>
+            <a:endParaRPr dirty="0"/>
           </a:p>
         </p:txBody>
       </p:sp>
@@ -16888,6 +17108,7 @@
           <a:lstStyle/>
           <a:p>
             <a:pPr algn="ctr"/>
+            <a:endParaRPr/>
           </a:p>
         </p:txBody>
       </p:sp>
@@ -16975,6 +17196,7 @@
           <a:lstStyle/>
           <a:p>
             <a:pPr algn="ctr"/>
+            <a:endParaRPr/>
           </a:p>
         </p:txBody>
       </p:sp>
@@ -17102,6 +17324,7 @@
           <a:lstStyle/>
           <a:p>
             <a:pPr algn="ctr"/>
+            <a:endParaRPr/>
           </a:p>
         </p:txBody>
       </p:sp>
@@ -17187,6 +17410,7 @@
           <a:lstStyle/>
           <a:p>
             <a:pPr algn="ctr"/>
+            <a:endParaRPr/>
           </a:p>
         </p:txBody>
       </p:sp>
@@ -17272,6 +17496,7 @@
           <a:lstStyle/>
           <a:p>
             <a:pPr algn="ctr"/>
+            <a:endParaRPr/>
           </a:p>
         </p:txBody>
       </p:sp>
@@ -17357,6 +17582,7 @@
           <a:lstStyle/>
           <a:p>
             <a:pPr algn="ctr"/>
+            <a:endParaRPr/>
           </a:p>
         </p:txBody>
       </p:sp>
@@ -17442,6 +17668,7 @@
           <a:lstStyle/>
           <a:p>
             <a:pPr algn="ctr"/>
+            <a:endParaRPr/>
           </a:p>
         </p:txBody>
       </p:sp>
@@ -17527,6 +17754,7 @@
           <a:lstStyle/>
           <a:p>
             <a:pPr algn="ctr"/>
+            <a:endParaRPr/>
           </a:p>
         </p:txBody>
       </p:sp>
@@ -17612,6 +17840,7 @@
           <a:lstStyle/>
           <a:p>
             <a:pPr algn="ctr"/>
+            <a:endParaRPr/>
           </a:p>
         </p:txBody>
       </p:sp>
@@ -17697,6 +17926,7 @@
           <a:lstStyle/>
           <a:p>
             <a:pPr algn="ctr"/>
+            <a:endParaRPr/>
           </a:p>
         </p:txBody>
       </p:sp>
@@ -17782,6 +18012,7 @@
           <a:lstStyle/>
           <a:p>
             <a:pPr algn="ctr"/>
+            <a:endParaRPr/>
           </a:p>
         </p:txBody>
       </p:sp>
@@ -17867,6 +18098,7 @@
           <a:lstStyle/>
           <a:p>
             <a:pPr algn="ctr"/>
+            <a:endParaRPr/>
           </a:p>
         </p:txBody>
       </p:sp>
@@ -17952,6 +18184,7 @@
           <a:lstStyle/>
           <a:p>
             <a:pPr algn="ctr"/>
+            <a:endParaRPr/>
           </a:p>
         </p:txBody>
       </p:sp>
@@ -18037,6 +18270,7 @@
           <a:lstStyle/>
           <a:p>
             <a:pPr algn="ctr"/>
+            <a:endParaRPr/>
           </a:p>
         </p:txBody>
       </p:sp>
@@ -18122,6 +18356,7 @@
           <a:lstStyle/>
           <a:p>
             <a:pPr algn="ctr"/>
+            <a:endParaRPr/>
           </a:p>
         </p:txBody>
       </p:sp>
@@ -18207,6 +18442,7 @@
           <a:lstStyle/>
           <a:p>
             <a:pPr algn="ctr"/>
+            <a:endParaRPr/>
           </a:p>
         </p:txBody>
       </p:sp>
@@ -18292,6 +18528,7 @@
           <a:lstStyle/>
           <a:p>
             <a:pPr algn="ctr"/>
+            <a:endParaRPr/>
           </a:p>
         </p:txBody>
       </p:sp>
@@ -18377,6 +18614,7 @@
           <a:lstStyle/>
           <a:p>
             <a:pPr algn="ctr"/>
+            <a:endParaRPr/>
           </a:p>
         </p:txBody>
       </p:sp>
@@ -18462,6 +18700,7 @@
           <a:lstStyle/>
           <a:p>
             <a:pPr algn="ctr"/>
+            <a:endParaRPr/>
           </a:p>
         </p:txBody>
       </p:sp>
@@ -18547,6 +18786,7 @@
           <a:lstStyle/>
           <a:p>
             <a:pPr algn="ctr"/>
+            <a:endParaRPr/>
           </a:p>
         </p:txBody>
       </p:sp>
@@ -18632,6 +18872,7 @@
           <a:lstStyle/>
           <a:p>
             <a:pPr algn="ctr"/>
+            <a:endParaRPr/>
           </a:p>
         </p:txBody>
       </p:sp>
@@ -18717,6 +18958,7 @@
           <a:lstStyle/>
           <a:p>
             <a:pPr algn="ctr"/>
+            <a:endParaRPr/>
           </a:p>
         </p:txBody>
       </p:sp>
@@ -18802,6 +19044,7 @@
           <a:lstStyle/>
           <a:p>
             <a:pPr algn="ctr"/>
+            <a:endParaRPr/>
           </a:p>
         </p:txBody>
       </p:sp>
@@ -18887,6 +19130,7 @@
           <a:lstStyle/>
           <a:p>
             <a:pPr algn="ctr"/>
+            <a:endParaRPr/>
           </a:p>
         </p:txBody>
       </p:sp>
@@ -18972,6 +19216,7 @@
           <a:lstStyle/>
           <a:p>
             <a:pPr algn="ctr"/>
+            <a:endParaRPr/>
           </a:p>
         </p:txBody>
       </p:sp>
@@ -19057,6 +19302,7 @@
           <a:lstStyle/>
           <a:p>
             <a:pPr algn="ctr"/>
+            <a:endParaRPr/>
           </a:p>
         </p:txBody>
       </p:sp>
@@ -19226,6 +19472,7 @@
           <a:lstStyle/>
           <a:p>
             <a:pPr algn="ctr"/>
+            <a:endParaRPr/>
           </a:p>
         </p:txBody>
       </p:sp>
@@ -19313,6 +19560,7 @@
           <a:lstStyle/>
           <a:p>
             <a:pPr algn="ctr"/>
+            <a:endParaRPr/>
           </a:p>
         </p:txBody>
       </p:sp>
@@ -19440,6 +19688,7 @@
           <a:lstStyle/>
           <a:p>
             <a:pPr algn="ctr"/>
+            <a:endParaRPr/>
           </a:p>
         </p:txBody>
       </p:sp>
@@ -19525,6 +19774,7 @@
           <a:lstStyle/>
           <a:p>
             <a:pPr algn="ctr"/>
+            <a:endParaRPr/>
           </a:p>
         </p:txBody>
       </p:sp>
@@ -19610,6 +19860,7 @@
           <a:lstStyle/>
           <a:p>
             <a:pPr algn="ctr"/>
+            <a:endParaRPr/>
           </a:p>
         </p:txBody>
       </p:sp>
@@ -19695,6 +19946,7 @@
           <a:lstStyle/>
           <a:p>
             <a:pPr algn="ctr"/>
+            <a:endParaRPr/>
           </a:p>
         </p:txBody>
       </p:sp>
@@ -19780,6 +20032,7 @@
           <a:lstStyle/>
           <a:p>
             <a:pPr algn="ctr"/>
+            <a:endParaRPr/>
           </a:p>
         </p:txBody>
       </p:sp>
@@ -19865,6 +20118,7 @@
           <a:lstStyle/>
           <a:p>
             <a:pPr algn="ctr"/>
+            <a:endParaRPr/>
           </a:p>
         </p:txBody>
       </p:sp>
@@ -19950,6 +20204,7 @@
           <a:lstStyle/>
           <a:p>
             <a:pPr algn="ctr"/>
+            <a:endParaRPr/>
           </a:p>
         </p:txBody>
       </p:sp>
@@ -20035,6 +20290,7 @@
           <a:lstStyle/>
           <a:p>
             <a:pPr algn="ctr"/>
+            <a:endParaRPr/>
           </a:p>
         </p:txBody>
       </p:sp>
@@ -20120,6 +20376,7 @@
           <a:lstStyle/>
           <a:p>
             <a:pPr algn="ctr"/>
+            <a:endParaRPr/>
           </a:p>
         </p:txBody>
       </p:sp>
@@ -20205,6 +20462,7 @@
           <a:lstStyle/>
           <a:p>
             <a:pPr algn="ctr"/>
+            <a:endParaRPr/>
           </a:p>
         </p:txBody>
       </p:sp>
@@ -20290,6 +20548,7 @@
           <a:lstStyle/>
           <a:p>
             <a:pPr algn="ctr"/>
+            <a:endParaRPr/>
           </a:p>
         </p:txBody>
       </p:sp>
@@ -20375,6 +20634,7 @@
           <a:lstStyle/>
           <a:p>
             <a:pPr algn="ctr"/>
+            <a:endParaRPr/>
           </a:p>
         </p:txBody>
       </p:sp>
@@ -20460,6 +20720,7 @@
           <a:lstStyle/>
           <a:p>
             <a:pPr algn="ctr"/>
+            <a:endParaRPr/>
           </a:p>
         </p:txBody>
       </p:sp>
@@ -20545,6 +20806,7 @@
           <a:lstStyle/>
           <a:p>
             <a:pPr algn="ctr"/>
+            <a:endParaRPr/>
           </a:p>
         </p:txBody>
       </p:sp>
@@ -20630,6 +20892,7 @@
           <a:lstStyle/>
           <a:p>
             <a:pPr algn="ctr"/>
+            <a:endParaRPr/>
           </a:p>
         </p:txBody>
       </p:sp>
@@ -20715,6 +20978,7 @@
           <a:lstStyle/>
           <a:p>
             <a:pPr algn="ctr"/>
+            <a:endParaRPr/>
           </a:p>
         </p:txBody>
       </p:sp>
@@ -20800,6 +21064,7 @@
           <a:lstStyle/>
           <a:p>
             <a:pPr algn="ctr"/>
+            <a:endParaRPr/>
           </a:p>
         </p:txBody>
       </p:sp>
@@ -20885,6 +21150,7 @@
           <a:lstStyle/>
           <a:p>
             <a:pPr algn="ctr"/>
+            <a:endParaRPr/>
           </a:p>
         </p:txBody>
       </p:sp>
@@ -20970,6 +21236,7 @@
           <a:lstStyle/>
           <a:p>
             <a:pPr algn="ctr"/>
+            <a:endParaRPr/>
           </a:p>
         </p:txBody>
       </p:sp>
@@ -21055,6 +21322,7 @@
           <a:lstStyle/>
           <a:p>
             <a:pPr algn="ctr"/>
+            <a:endParaRPr/>
           </a:p>
         </p:txBody>
       </p:sp>
@@ -21140,6 +21408,7 @@
           <a:lstStyle/>
           <a:p>
             <a:pPr algn="ctr"/>
+            <a:endParaRPr/>
           </a:p>
         </p:txBody>
       </p:sp>
@@ -21225,6 +21494,7 @@
           <a:lstStyle/>
           <a:p>
             <a:pPr algn="ctr"/>
+            <a:endParaRPr/>
           </a:p>
         </p:txBody>
       </p:sp>
@@ -21310,6 +21580,7 @@
           <a:lstStyle/>
           <a:p>
             <a:pPr algn="ctr"/>
+            <a:endParaRPr/>
           </a:p>
         </p:txBody>
       </p:sp>
@@ -21395,6 +21666,7 @@
           <a:lstStyle/>
           <a:p>
             <a:pPr algn="ctr"/>
+            <a:endParaRPr/>
           </a:p>
         </p:txBody>
       </p:sp>
@@ -21564,6 +21836,7 @@
           <a:lstStyle/>
           <a:p>
             <a:pPr algn="ctr"/>
+            <a:endParaRPr/>
           </a:p>
         </p:txBody>
       </p:sp>
@@ -21651,6 +21924,7 @@
           <a:lstStyle/>
           <a:p>
             <a:pPr algn="ctr"/>
+            <a:endParaRPr/>
           </a:p>
         </p:txBody>
       </p:sp>
@@ -21778,6 +22052,7 @@
           <a:lstStyle/>
           <a:p>
             <a:pPr algn="ctr"/>
+            <a:endParaRPr/>
           </a:p>
         </p:txBody>
       </p:sp>
@@ -21863,6 +22138,7 @@
           <a:lstStyle/>
           <a:p>
             <a:pPr algn="ctr"/>
+            <a:endParaRPr/>
           </a:p>
         </p:txBody>
       </p:sp>
@@ -21948,6 +22224,7 @@
           <a:lstStyle/>
           <a:p>
             <a:pPr algn="ctr"/>
+            <a:endParaRPr/>
           </a:p>
         </p:txBody>
       </p:sp>
@@ -22033,6 +22310,7 @@
           <a:lstStyle/>
           <a:p>
             <a:pPr algn="ctr"/>
+            <a:endParaRPr/>
           </a:p>
         </p:txBody>
       </p:sp>
@@ -22118,6 +22396,7 @@
           <a:lstStyle/>
           <a:p>
             <a:pPr algn="ctr"/>
+            <a:endParaRPr/>
           </a:p>
         </p:txBody>
       </p:sp>
@@ -22203,6 +22482,7 @@
           <a:lstStyle/>
           <a:p>
             <a:pPr algn="ctr"/>
+            <a:endParaRPr/>
           </a:p>
         </p:txBody>
       </p:sp>
@@ -22288,6 +22568,7 @@
           <a:lstStyle/>
           <a:p>
             <a:pPr algn="ctr"/>
+            <a:endParaRPr/>
           </a:p>
         </p:txBody>
       </p:sp>
@@ -22373,6 +22654,7 @@
           <a:lstStyle/>
           <a:p>
             <a:pPr algn="ctr"/>
+            <a:endParaRPr/>
           </a:p>
         </p:txBody>
       </p:sp>
@@ -22458,6 +22740,7 @@
           <a:lstStyle/>
           <a:p>
             <a:pPr algn="ctr"/>
+            <a:endParaRPr/>
           </a:p>
         </p:txBody>
       </p:sp>
@@ -22543,6 +22826,7 @@
           <a:lstStyle/>
           <a:p>
             <a:pPr algn="ctr"/>
+            <a:endParaRPr/>
           </a:p>
         </p:txBody>
       </p:sp>
@@ -22628,6 +22912,7 @@
           <a:lstStyle/>
           <a:p>
             <a:pPr algn="ctr"/>
+            <a:endParaRPr/>
           </a:p>
         </p:txBody>
       </p:sp>
@@ -22713,6 +22998,7 @@
           <a:lstStyle/>
           <a:p>
             <a:pPr algn="ctr"/>
+            <a:endParaRPr/>
           </a:p>
         </p:txBody>
       </p:sp>
@@ -22798,6 +23084,7 @@
           <a:lstStyle/>
           <a:p>
             <a:pPr algn="ctr"/>
+            <a:endParaRPr/>
           </a:p>
         </p:txBody>
       </p:sp>
@@ -22883,6 +23170,7 @@
           <a:lstStyle/>
           <a:p>
             <a:pPr algn="ctr"/>
+            <a:endParaRPr/>
           </a:p>
         </p:txBody>
       </p:sp>
@@ -22968,6 +23256,7 @@
           <a:lstStyle/>
           <a:p>
             <a:pPr algn="ctr"/>
+            <a:endParaRPr/>
           </a:p>
         </p:txBody>
       </p:sp>
@@ -23053,6 +23342,7 @@
           <a:lstStyle/>
           <a:p>
             <a:pPr algn="ctr"/>
+            <a:endParaRPr/>
           </a:p>
         </p:txBody>
       </p:sp>
@@ -23138,6 +23428,7 @@
           <a:lstStyle/>
           <a:p>
             <a:pPr algn="ctr"/>
+            <a:endParaRPr/>
           </a:p>
         </p:txBody>
       </p:sp>
@@ -23223,6 +23514,7 @@
           <a:lstStyle/>
           <a:p>
             <a:pPr algn="ctr"/>
+            <a:endParaRPr/>
           </a:p>
         </p:txBody>
       </p:sp>
@@ -23308,6 +23600,7 @@
           <a:lstStyle/>
           <a:p>
             <a:pPr algn="ctr"/>
+            <a:endParaRPr/>
           </a:p>
         </p:txBody>
       </p:sp>
@@ -23393,6 +23686,7 @@
           <a:lstStyle/>
           <a:p>
             <a:pPr algn="ctr"/>
+            <a:endParaRPr/>
           </a:p>
         </p:txBody>
       </p:sp>
@@ -23478,6 +23772,7 @@
           <a:lstStyle/>
           <a:p>
             <a:pPr algn="ctr"/>
+            <a:endParaRPr/>
           </a:p>
         </p:txBody>
       </p:sp>
@@ -23563,6 +23858,7 @@
           <a:lstStyle/>
           <a:p>
             <a:pPr algn="ctr"/>
+            <a:endParaRPr/>
           </a:p>
         </p:txBody>
       </p:sp>
@@ -23648,6 +23944,7 @@
           <a:lstStyle/>
           <a:p>
             <a:pPr algn="ctr"/>
+            <a:endParaRPr/>
           </a:p>
         </p:txBody>
       </p:sp>
@@ -23733,6 +24030,7 @@
           <a:lstStyle/>
           <a:p>
             <a:pPr algn="ctr"/>
+            <a:endParaRPr/>
           </a:p>
         </p:txBody>
       </p:sp>
@@ -23955,7 +24253,7 @@
 </file>
 
 <file path=ppt/slides/slide7.xml><?xml version="1.0" encoding="utf-8"?>
-<p:sld xmlns:a="http://schemas.openxmlformats.org/drawingml/2006/main" xmlns:p="http://schemas.openxmlformats.org/presentationml/2006/main" xmlns:r="http://schemas.openxmlformats.org/officeDocument/2006/relationships">
+<p:sld xmlns:a="http://schemas.openxmlformats.org/drawingml/2006/main" xmlns:r="http://schemas.openxmlformats.org/officeDocument/2006/relationships" xmlns:p="http://schemas.openxmlformats.org/presentationml/2006/main">
   <p:cSld>
     <p:bg>
       <p:bgPr>
@@ -23971,7 +24269,14 @@
         <p:cNvGrpSpPr/>
         <p:nvPr/>
       </p:nvGrpSpPr>
-      <p:grpSpPr/>
+      <p:grpSpPr>
+        <a:xfrm>
+          <a:off x="0" y="0"/>
+          <a:ext cx="0" cy="0"/>
+          <a:chOff x="0" y="0"/>
+          <a:chExt cx="0" cy="0"/>
+        </a:xfrm>
+      </p:grpSpPr>
       <p:sp>
         <p:nvSpPr>
           <p:cNvPr id="2" name="Rectangle 1"/>
@@ -24012,6 +24317,7 @@
           <a:lstStyle/>
           <a:p>
             <a:pPr algn="ctr"/>
+            <a:endParaRPr/>
           </a:p>
         </p:txBody>
       </p:sp>
@@ -24118,7 +24424,7 @@
         <p:spPr>
           <a:xfrm>
             <a:off x="1280160" y="548640"/>
-            <a:ext cx="8229600" cy="365760"/>
+            <a:ext cx="8229600" cy="303225"/>
           </a:xfrm>
           <a:prstGeom prst="rect">
             <a:avLst/>
@@ -24146,49 +24452,28 @@
               </a:defRPr>
             </a:pPr>
             <a:r>
-              <a:t>Separation stricte des responsabilites</a:t>
-            </a:r>
-          </a:p>
-        </p:txBody>
-      </p:sp>
-      <p:sp>
-        <p:nvSpPr>
-          <p:cNvPr id="6" name="TextBox 5"/>
-          <p:cNvSpPr txBox="1"/>
-          <p:nvPr/>
-        </p:nvSpPr>
-        <p:spPr>
-          <a:xfrm>
-            <a:off x="10180015" y="320040"/>
-            <a:ext cx="1645920" cy="365760"/>
-          </a:xfrm>
-          <a:prstGeom prst="rect">
-            <a:avLst/>
-          </a:prstGeom>
-          <a:noFill/>
-        </p:spPr>
-        <p:txBody>
-          <a:bodyPr wrap="square">
-            <a:spAutoFit/>
-          </a:bodyPr>
-          <a:lstStyle/>
-          <a:p>
-            <a:pPr algn="r">
-              <a:lnSpc>
-                <a:spcPts val="1320"/>
-              </a:lnSpc>
-              <a:spcAft>
-                <a:spcPts val="400"/>
-              </a:spcAft>
-              <a:defRPr sz="1100" b="0" i="1">
-                <a:solidFill>
-                  <a:srgbClr val="AABBDD"/>
-                </a:solidFill>
-                <a:latin typeface="Calibri"/>
-              </a:defRPr>
-            </a:pPr>
-            <a:r>
-              <a:t>1 min</a:t>
+              <a:rPr dirty="0"/>
+              <a:t>Separation </a:t>
+            </a:r>
+            <a:r>
+              <a:rPr dirty="0" err="1"/>
+              <a:t>stricte</a:t>
+            </a:r>
+            <a:r>
+              <a:rPr dirty="0"/>
+              <a:t> des </a:t>
+            </a:r>
+            <a:r>
+              <a:rPr dirty="0" err="1"/>
+              <a:t>responsabilit</a:t>
+            </a:r>
+            <a:r>
+              <a:rPr lang="fr-FR" dirty="0"/>
+              <a:t>é</a:t>
+            </a:r>
+            <a:r>
+              <a:rPr dirty="0"/>
+              <a:t>s</a:t>
             </a:r>
           </a:p>
         </p:txBody>
@@ -24202,7 +24487,7 @@
         <p:spPr>
           <a:xfrm>
             <a:off x="457200" y="1143000"/>
-            <a:ext cx="11247120" cy="320040"/>
+            <a:ext cx="11247120" cy="271869"/>
           </a:xfrm>
           <a:prstGeom prst="rect">
             <a:avLst/>
@@ -24230,7 +24515,28 @@
               </a:defRPr>
             </a:pPr>
             <a:r>
-              <a:t>Architecture en couches decouplees : API Laravel (Model + Controller) + SPA Next.js (View)</a:t>
+              <a:rPr dirty="0"/>
+              <a:t>Architecture </a:t>
+            </a:r>
+            <a:r>
+              <a:rPr dirty="0" err="1"/>
+              <a:t>en</a:t>
+            </a:r>
+            <a:r>
+              <a:rPr dirty="0"/>
+              <a:t> couches </a:t>
+            </a:r>
+            <a:r>
+              <a:rPr dirty="0" err="1"/>
+              <a:t>decoupl</a:t>
+            </a:r>
+            <a:r>
+              <a:rPr lang="fr-FR" dirty="0"/>
+              <a:t>é</a:t>
+            </a:r>
+            <a:r>
+              <a:rPr dirty="0"/>
+              <a:t>es : API Laravel (Model + Controller) + SPA Next.js (View)</a:t>
             </a:r>
           </a:p>
         </p:txBody>
@@ -24277,6 +24583,7 @@
           <a:lstStyle/>
           <a:p>
             <a:pPr algn="ctr"/>
+            <a:endParaRPr/>
           </a:p>
         </p:txBody>
       </p:sp>
@@ -24320,6 +24627,7 @@
           <a:lstStyle/>
           <a:p>
             <a:pPr algn="ctr"/>
+            <a:endParaRPr/>
           </a:p>
         </p:txBody>
       </p:sp>
@@ -24489,6 +24797,7 @@
           <a:lstStyle/>
           <a:p>
             <a:pPr algn="ctr"/>
+            <a:endParaRPr/>
           </a:p>
         </p:txBody>
       </p:sp>
@@ -24574,6 +24883,7 @@
           <a:lstStyle/>
           <a:p>
             <a:pPr algn="ctr"/>
+            <a:endParaRPr/>
           </a:p>
         </p:txBody>
       </p:sp>
@@ -24659,6 +24969,7 @@
           <a:lstStyle/>
           <a:p>
             <a:pPr algn="ctr"/>
+            <a:endParaRPr/>
           </a:p>
         </p:txBody>
       </p:sp>
@@ -24744,6 +25055,7 @@
           <a:lstStyle/>
           <a:p>
             <a:pPr algn="ctr"/>
+            <a:endParaRPr/>
           </a:p>
         </p:txBody>
       </p:sp>
@@ -24829,6 +25141,7 @@
           <a:lstStyle/>
           <a:p>
             <a:pPr algn="ctr"/>
+            <a:endParaRPr/>
           </a:p>
         </p:txBody>
       </p:sp>
@@ -24869,101 +25182,10 @@
               </a:defRPr>
             </a:pPr>
             <a:r>
-              <a:t>+ Category, Progression,</a:t>
+              <a:t>+ Category, Progression, RelationType, ResourceType, ActivitySession, ResourceView, SearchLog</a:t>
             </a:r>
             <a:br/>
-            <a:r>
-              <a:t>  RelationType, ResourceType</a:t>
-            </a:r>
-          </a:p>
-        </p:txBody>
-      </p:sp>
-      <p:sp>
-        <p:nvSpPr>
-          <p:cNvPr id="23" name="Rounded Rectangle 22"/>
-          <p:cNvSpPr/>
-          <p:nvPr/>
-        </p:nvSpPr>
-        <p:spPr>
-          <a:xfrm>
-            <a:off x="594360" y="4297680"/>
-            <a:ext cx="3246120" cy="548640"/>
-          </a:xfrm>
-          <a:prstGeom prst="roundRect">
-            <a:avLst/>
-          </a:prstGeom>
-          <a:solidFill>
-            <a:srgbClr val="F2F6FA"/>
-          </a:solidFill>
-          <a:ln>
-            <a:noFill/>
-          </a:ln>
-        </p:spPr>
-        <p:style>
-          <a:lnRef idx="1">
-            <a:schemeClr val="accent1"/>
-          </a:lnRef>
-          <a:fillRef idx="3">
-            <a:schemeClr val="accent1"/>
-          </a:fillRef>
-          <a:effectRef idx="2">
-            <a:schemeClr val="accent1"/>
-          </a:effectRef>
-          <a:fontRef idx="minor">
-            <a:schemeClr val="lt1"/>
-          </a:fontRef>
-        </p:style>
-        <p:txBody>
-          <a:bodyPr rtlCol="0" anchor="ctr"/>
-          <a:lstStyle/>
-          <a:p>
-            <a:pPr algn="ctr"/>
-          </a:p>
-        </p:txBody>
-      </p:sp>
-      <p:sp>
-        <p:nvSpPr>
-          <p:cNvPr id="24" name="TextBox 23"/>
-          <p:cNvSpPr txBox="1"/>
-          <p:nvPr/>
-        </p:nvSpPr>
-        <p:spPr>
-          <a:xfrm>
-            <a:off x="640080" y="4370832"/>
-            <a:ext cx="3154680" cy="457200"/>
-          </a:xfrm>
-          <a:prstGeom prst="rect">
-            <a:avLst/>
-          </a:prstGeom>
-          <a:noFill/>
-        </p:spPr>
-        <p:txBody>
-          <a:bodyPr wrap="square">
-            <a:spAutoFit/>
-          </a:bodyPr>
-          <a:lstStyle/>
-          <a:p>
-            <a:pPr algn="ctr">
-              <a:lnSpc>
-                <a:spcPts val="1080"/>
-              </a:lnSpc>
-              <a:spcAft>
-                <a:spcPts val="400"/>
-              </a:spcAft>
-              <a:defRPr sz="900" b="0" i="1">
-                <a:solidFill>
-                  <a:srgbClr val="666666"/>
-                </a:solidFill>
-                <a:latin typeface="Calibri"/>
-              </a:defRPr>
-            </a:pPr>
-            <a:r>
-              <a:t>Eloquent ORM</a:t>
-            </a:r>
-            <a:br/>
-            <a:r>
-              <a:t>Relations, scopes, casts</a:t>
-            </a:r>
+            <a:endParaRPr/>
           </a:p>
         </p:txBody>
       </p:sp>
@@ -25009,6 +25231,7 @@
           <a:lstStyle/>
           <a:p>
             <a:pPr algn="ctr"/>
+            <a:endParaRPr/>
           </a:p>
         </p:txBody>
       </p:sp>
@@ -25052,6 +25275,7 @@
           <a:lstStyle/>
           <a:p>
             <a:pPr algn="ctr"/>
+            <a:endParaRPr/>
           </a:p>
         </p:txBody>
       </p:sp>
@@ -25221,6 +25445,7 @@
           <a:lstStyle/>
           <a:p>
             <a:pPr algn="ctr"/>
+            <a:endParaRPr/>
           </a:p>
         </p:txBody>
       </p:sp>
@@ -25310,6 +25535,7 @@
           <a:lstStyle/>
           <a:p>
             <a:pPr algn="ctr"/>
+            <a:endParaRPr/>
           </a:p>
         </p:txBody>
       </p:sp>
@@ -25395,6 +25621,7 @@
           <a:lstStyle/>
           <a:p>
             <a:pPr algn="ctr"/>
+            <a:endParaRPr/>
           </a:p>
         </p:txBody>
       </p:sp>
@@ -25480,6 +25707,7 @@
           <a:lstStyle/>
           <a:p>
             <a:pPr algn="ctr"/>
+            <a:endParaRPr/>
           </a:p>
         </p:txBody>
       </p:sp>
@@ -25565,6 +25793,7 @@
           <a:lstStyle/>
           <a:p>
             <a:pPr algn="ctr"/>
+            <a:endParaRPr/>
           </a:p>
         </p:txBody>
       </p:sp>
@@ -25605,101 +25834,10 @@
               </a:defRPr>
             </a:pPr>
             <a:r>
-              <a:t>+ Moderation, Favorite,</a:t>
+              <a:t>+ Moderation, Favorite, Progression, SuperAdmin, Activity, Category</a:t>
             </a:r>
             <a:br/>
-            <a:r>
-              <a:t>  Progression, SuperAdmin</a:t>
-            </a:r>
-          </a:p>
-        </p:txBody>
-      </p:sp>
-      <p:sp>
-        <p:nvSpPr>
-          <p:cNvPr id="40" name="Rounded Rectangle 39"/>
-          <p:cNvSpPr/>
-          <p:nvPr/>
-        </p:nvSpPr>
-        <p:spPr>
-          <a:xfrm>
-            <a:off x="4434840" y="4297680"/>
-            <a:ext cx="3246120" cy="548640"/>
-          </a:xfrm>
-          <a:prstGeom prst="roundRect">
-            <a:avLst/>
-          </a:prstGeom>
-          <a:solidFill>
-            <a:srgbClr val="F2F6FA"/>
-          </a:solidFill>
-          <a:ln>
-            <a:noFill/>
-          </a:ln>
-        </p:spPr>
-        <p:style>
-          <a:lnRef idx="1">
-            <a:schemeClr val="accent1"/>
-          </a:lnRef>
-          <a:fillRef idx="3">
-            <a:schemeClr val="accent1"/>
-          </a:fillRef>
-          <a:effectRef idx="2">
-            <a:schemeClr val="accent1"/>
-          </a:effectRef>
-          <a:fontRef idx="minor">
-            <a:schemeClr val="lt1"/>
-          </a:fontRef>
-        </p:style>
-        <p:txBody>
-          <a:bodyPr rtlCol="0" anchor="ctr"/>
-          <a:lstStyle/>
-          <a:p>
-            <a:pPr algn="ctr"/>
-          </a:p>
-        </p:txBody>
-      </p:sp>
-      <p:sp>
-        <p:nvSpPr>
-          <p:cNvPr id="41" name="TextBox 40"/>
-          <p:cNvSpPr txBox="1"/>
-          <p:nvPr/>
-        </p:nvSpPr>
-        <p:spPr>
-          <a:xfrm>
-            <a:off x="4480560" y="4370832"/>
-            <a:ext cx="3154680" cy="457200"/>
-          </a:xfrm>
-          <a:prstGeom prst="rect">
-            <a:avLst/>
-          </a:prstGeom>
-          <a:noFill/>
-        </p:spPr>
-        <p:txBody>
-          <a:bodyPr wrap="square">
-            <a:spAutoFit/>
-          </a:bodyPr>
-          <a:lstStyle/>
-          <a:p>
-            <a:pPr algn="ctr">
-              <a:lnSpc>
-                <a:spcPts val="1080"/>
-              </a:lnSpc>
-              <a:spcAft>
-                <a:spcPts val="400"/>
-              </a:spcAft>
-              <a:defRPr sz="900" b="0" i="1">
-                <a:solidFill>
-                  <a:srgbClr val="666666"/>
-                </a:solidFill>
-                <a:latin typeface="Calibri"/>
-              </a:defRPr>
-            </a:pPr>
-            <a:r>
-              <a:t>FormRequest + Policies</a:t>
-            </a:r>
-            <a:br/>
-            <a:r>
-              <a:t>Middleware auth:sanctum</a:t>
-            </a:r>
+            <a:endParaRPr/>
           </a:p>
         </p:txBody>
       </p:sp>
@@ -25745,6 +25883,7 @@
           <a:lstStyle/>
           <a:p>
             <a:pPr algn="ctr"/>
+            <a:endParaRPr/>
           </a:p>
         </p:txBody>
       </p:sp>
@@ -25788,6 +25927,7 @@
           <a:lstStyle/>
           <a:p>
             <a:pPr algn="ctr"/>
+            <a:endParaRPr/>
           </a:p>
         </p:txBody>
       </p:sp>
@@ -25957,6 +26097,7 @@
           <a:lstStyle/>
           <a:p>
             <a:pPr algn="ctr"/>
+            <a:endParaRPr/>
           </a:p>
         </p:txBody>
       </p:sp>
@@ -26046,6 +26187,7 @@
           <a:lstStyle/>
           <a:p>
             <a:pPr algn="ctr"/>
+            <a:endParaRPr/>
           </a:p>
         </p:txBody>
       </p:sp>
@@ -26131,6 +26273,7 @@
           <a:lstStyle/>
           <a:p>
             <a:pPr algn="ctr"/>
+            <a:endParaRPr/>
           </a:p>
         </p:txBody>
       </p:sp>
@@ -26171,7 +26314,7 @@
               </a:defRPr>
             </a:pPr>
             <a:r>
-              <a:t>administration/</a:t>
+              <a:t>admin/</a:t>
             </a:r>
           </a:p>
         </p:txBody>
@@ -26216,6 +26359,7 @@
           <a:lstStyle/>
           <a:p>
             <a:pPr algn="ctr"/>
+            <a:endParaRPr/>
           </a:p>
         </p:txBody>
       </p:sp>
@@ -26305,6 +26449,7 @@
           <a:lstStyle/>
           <a:p>
             <a:pPr algn="ctr"/>
+            <a:endParaRPr/>
           </a:p>
         </p:txBody>
       </p:sp>
@@ -26350,95 +26495,6 @@
             <a:br/>
             <a:r>
               <a:t>  AuthContext</a:t>
-            </a:r>
-          </a:p>
-        </p:txBody>
-      </p:sp>
-      <p:sp>
-        <p:nvSpPr>
-          <p:cNvPr id="57" name="Rounded Rectangle 56"/>
-          <p:cNvSpPr/>
-          <p:nvPr/>
-        </p:nvSpPr>
-        <p:spPr>
-          <a:xfrm>
-            <a:off x="8275320" y="4297680"/>
-            <a:ext cx="3246120" cy="548640"/>
-          </a:xfrm>
-          <a:prstGeom prst="roundRect">
-            <a:avLst/>
-          </a:prstGeom>
-          <a:solidFill>
-            <a:srgbClr val="F2F6FA"/>
-          </a:solidFill>
-          <a:ln>
-            <a:noFill/>
-          </a:ln>
-        </p:spPr>
-        <p:style>
-          <a:lnRef idx="1">
-            <a:schemeClr val="accent1"/>
-          </a:lnRef>
-          <a:fillRef idx="3">
-            <a:schemeClr val="accent1"/>
-          </a:fillRef>
-          <a:effectRef idx="2">
-            <a:schemeClr val="accent1"/>
-          </a:effectRef>
-          <a:fontRef idx="minor">
-            <a:schemeClr val="lt1"/>
-          </a:fontRef>
-        </p:style>
-        <p:txBody>
-          <a:bodyPr rtlCol="0" anchor="ctr"/>
-          <a:lstStyle/>
-          <a:p>
-            <a:pPr algn="ctr"/>
-          </a:p>
-        </p:txBody>
-      </p:sp>
-      <p:sp>
-        <p:nvSpPr>
-          <p:cNvPr id="58" name="TextBox 57"/>
-          <p:cNvSpPr txBox="1"/>
-          <p:nvPr/>
-        </p:nvSpPr>
-        <p:spPr>
-          <a:xfrm>
-            <a:off x="8321040" y="4370832"/>
-            <a:ext cx="3154680" cy="457200"/>
-          </a:xfrm>
-          <a:prstGeom prst="rect">
-            <a:avLst/>
-          </a:prstGeom>
-          <a:noFill/>
-        </p:spPr>
-        <p:txBody>
-          <a:bodyPr wrap="square">
-            <a:spAutoFit/>
-          </a:bodyPr>
-          <a:lstStyle/>
-          <a:p>
-            <a:pPr algn="ctr">
-              <a:lnSpc>
-                <a:spcPts val="1080"/>
-              </a:lnSpc>
-              <a:spcAft>
-                <a:spcPts val="400"/>
-              </a:spcAft>
-              <a:defRPr sz="900" b="0" i="1">
-                <a:solidFill>
-                  <a:srgbClr val="666666"/>
-                </a:solidFill>
-                <a:latin typeface="Calibri"/>
-              </a:defRPr>
-            </a:pPr>
-            <a:r>
-              <a:t>Next.js 16 App Router</a:t>
-            </a:r>
-            <a:br/>
-            <a:r>
-              <a:t>React 19 + TypeScript + Tailwind</a:t>
             </a:r>
           </a:p>
         </p:txBody>
@@ -26483,6 +26539,7 @@
           <a:lstStyle/>
           <a:p>
             <a:pPr algn="ctr"/>
+            <a:endParaRPr/>
           </a:p>
         </p:txBody>
       </p:sp>
@@ -26526,6 +26583,7 @@
           <a:lstStyle/>
           <a:p>
             <a:pPr algn="ctr"/>
+            <a:endParaRPr/>
           </a:p>
         </p:txBody>
       </p:sp>
@@ -26613,6 +26671,7 @@
           <a:lstStyle/>
           <a:p>
             <a:pPr algn="ctr"/>
+            <a:endParaRPr/>
           </a:p>
         </p:txBody>
       </p:sp>
@@ -26700,6 +26759,7 @@
           <a:lstStyle/>
           <a:p>
             <a:pPr algn="ctr"/>
+            <a:endParaRPr/>
           </a:p>
         </p:txBody>
       </p:sp>
@@ -26787,6 +26847,7 @@
           <a:lstStyle/>
           <a:p>
             <a:pPr algn="ctr"/>
+            <a:endParaRPr/>
           </a:p>
         </p:txBody>
       </p:sp>
@@ -26874,6 +26935,7 @@
           <a:lstStyle/>
           <a:p>
             <a:pPr algn="ctr"/>
+            <a:endParaRPr/>
           </a:p>
         </p:txBody>
       </p:sp>
@@ -26961,6 +27023,7 @@
           <a:lstStyle/>
           <a:p>
             <a:pPr algn="ctr"/>
+            <a:endParaRPr/>
           </a:p>
         </p:txBody>
       </p:sp>
@@ -27048,6 +27111,7 @@
           <a:lstStyle/>
           <a:p>
             <a:pPr algn="ctr"/>
+            <a:endParaRPr/>
           </a:p>
         </p:txBody>
       </p:sp>
@@ -27060,7 +27124,7 @@
         <p:spPr>
           <a:xfrm>
             <a:off x="1901952" y="5650992"/>
-            <a:ext cx="2139696" cy="365760"/>
+            <a:ext cx="2139696" cy="246221"/>
           </a:xfrm>
           <a:prstGeom prst="rect">
             <a:avLst/>
@@ -27088,7 +27152,40 @@
               </a:defRPr>
             </a:pPr>
             <a:r>
-              <a:t>Donnees, logique metier, acces BDD</a:t>
+              <a:rPr dirty="0"/>
+              <a:t>Donn</a:t>
+            </a:r>
+            <a:r>
+              <a:rPr lang="fr-FR" dirty="0"/>
+              <a:t>é</a:t>
+            </a:r>
+            <a:r>
+              <a:rPr dirty="0"/>
+              <a:t>es, </a:t>
+            </a:r>
+            <a:r>
+              <a:rPr dirty="0" err="1"/>
+              <a:t>logique</a:t>
+            </a:r>
+            <a:r>
+              <a:rPr dirty="0"/>
+              <a:t> </a:t>
+            </a:r>
+            <a:r>
+              <a:rPr dirty="0" err="1"/>
+              <a:t>metier</a:t>
+            </a:r>
+            <a:r>
+              <a:rPr dirty="0"/>
+              <a:t>, </a:t>
+            </a:r>
+            <a:r>
+              <a:rPr dirty="0" err="1"/>
+              <a:t>acces</a:t>
+            </a:r>
+            <a:r>
+              <a:rPr dirty="0"/>
+              <a:t> BDD</a:t>
             </a:r>
           </a:p>
         </p:txBody>
@@ -27135,6 +27232,7 @@
           <a:lstStyle/>
           <a:p>
             <a:pPr algn="ctr"/>
+            <a:endParaRPr/>
           </a:p>
         </p:txBody>
       </p:sp>
@@ -27175,7 +27273,7 @@
               </a:defRPr>
             </a:pPr>
             <a:r>
-              <a:t>8 modeles Eloquent (User, Resource, Comment...)</a:t>
+              <a:t>13 modeles Eloquent (User, Resource, Comment, Activity...)</a:t>
             </a:r>
           </a:p>
         </p:txBody>
@@ -27222,6 +27320,7 @@
           <a:lstStyle/>
           <a:p>
             <a:pPr algn="ctr"/>
+            <a:endParaRPr/>
           </a:p>
         </p:txBody>
       </p:sp>
@@ -27309,6 +27408,7 @@
           <a:lstStyle/>
           <a:p>
             <a:pPr algn="ctr"/>
+            <a:endParaRPr/>
           </a:p>
         </p:txBody>
       </p:sp>
@@ -27396,6 +27496,7 @@
           <a:lstStyle/>
           <a:p>
             <a:pPr algn="ctr"/>
+            <a:endParaRPr/>
           </a:p>
         </p:txBody>
       </p:sp>
@@ -27483,6 +27584,7 @@
           <a:lstStyle/>
           <a:p>
             <a:pPr algn="ctr"/>
+            <a:endParaRPr/>
           </a:p>
         </p:txBody>
       </p:sp>
@@ -27523,7 +27625,7 @@
               </a:defRPr>
             </a:pPr>
             <a:r>
-              <a:t>9 controllers + FormRequest + Policies</a:t>
+              <a:t>10 controllers + FormRequest + Policies</a:t>
             </a:r>
           </a:p>
         </p:txBody>
@@ -27570,6 +27672,7 @@
           <a:lstStyle/>
           <a:p>
             <a:pPr algn="ctr"/>
+            <a:endParaRPr/>
           </a:p>
         </p:txBody>
       </p:sp>
@@ -27657,6 +27760,7 @@
           <a:lstStyle/>
           <a:p>
             <a:pPr algn="ctr"/>
+            <a:endParaRPr/>
           </a:p>
         </p:txBody>
       </p:sp>
@@ -27744,6 +27848,7 @@
           <a:lstStyle/>
           <a:p>
             <a:pPr algn="ctr"/>
+            <a:endParaRPr/>
           </a:p>
         </p:txBody>
       </p:sp>
@@ -27831,6 +27936,7 @@
           <a:lstStyle/>
           <a:p>
             <a:pPr algn="ctr"/>
+            <a:endParaRPr/>
           </a:p>
         </p:txBody>
       </p:sp>
@@ -27918,6 +28024,7 @@
           <a:lstStyle/>
           <a:p>
             <a:pPr algn="ctr"/>
+            <a:endParaRPr/>
           </a:p>
         </p:txBody>
       </p:sp>
@@ -27959,48 +28066,6 @@
             </a:pPr>
             <a:r>
               <a:t>✓ Oui</a:t>
-            </a:r>
-          </a:p>
-        </p:txBody>
-      </p:sp>
-      <p:sp>
-        <p:nvSpPr>
-          <p:cNvPr id="94" name="TextBox 93"/>
-          <p:cNvSpPr txBox="1"/>
-          <p:nvPr/>
-        </p:nvSpPr>
-        <p:spPr>
-          <a:xfrm>
-            <a:off x="457200" y="6446520"/>
-            <a:ext cx="11247120" cy="274320"/>
-          </a:xfrm>
-          <a:prstGeom prst="rect">
-            <a:avLst/>
-          </a:prstGeom>
-          <a:noFill/>
-        </p:spPr>
-        <p:txBody>
-          <a:bodyPr wrap="square">
-            <a:spAutoFit/>
-          </a:bodyPr>
-          <a:lstStyle/>
-          <a:p>
-            <a:pPr algn="ctr">
-              <a:lnSpc>
-                <a:spcPts val="1200"/>
-              </a:lnSpc>
-              <a:spcAft>
-                <a:spcPts val="400"/>
-              </a:spcAft>
-              <a:defRPr sz="1000" b="0" i="1">
-                <a:solidFill>
-                  <a:srgbClr val="666666"/>
-                </a:solidFill>
-                <a:latin typeface="Calibri"/>
-              </a:defRPr>
-            </a:pPr>
-            <a:r>
-              <a:t>Separation stricte — aucune logique metier dans les vues, aucun rendu HTML dans les controllers (API JSON uniquement)</a:t>
             </a:r>
           </a:p>
         </p:txBody>
@@ -28056,7 +28121,7 @@
 </file>
 
 <file path=ppt/slides/slide8.xml><?xml version="1.0" encoding="utf-8"?>
-<p:sld xmlns:a="http://schemas.openxmlformats.org/drawingml/2006/main" xmlns:p="http://schemas.openxmlformats.org/presentationml/2006/main" xmlns:r="http://schemas.openxmlformats.org/officeDocument/2006/relationships">
+<p:sld xmlns:a="http://schemas.openxmlformats.org/drawingml/2006/main" xmlns:r="http://schemas.openxmlformats.org/officeDocument/2006/relationships" xmlns:p="http://schemas.openxmlformats.org/presentationml/2006/main">
   <p:cSld>
     <p:bg>
       <p:bgPr>
@@ -28072,7 +28137,14 @@
         <p:cNvGrpSpPr/>
         <p:nvPr/>
       </p:nvGrpSpPr>
-      <p:grpSpPr/>
+      <p:grpSpPr>
+        <a:xfrm>
+          <a:off x="0" y="0"/>
+          <a:ext cx="0" cy="0"/>
+          <a:chOff x="0" y="0"/>
+          <a:chExt cx="0" cy="0"/>
+        </a:xfrm>
+      </p:grpSpPr>
       <p:sp>
         <p:nvSpPr>
           <p:cNvPr id="2" name="Rectangle 1"/>
@@ -28113,6 +28185,7 @@
           <a:lstStyle/>
           <a:p>
             <a:pPr algn="ctr"/>
+            <a:endParaRPr/>
           </a:p>
         </p:txBody>
       </p:sp>
@@ -28177,7 +28250,7 @@
         <p:spPr>
           <a:xfrm>
             <a:off x="1280160" y="137160"/>
-            <a:ext cx="8229600" cy="457200"/>
+            <a:ext cx="8229600" cy="514115"/>
           </a:xfrm>
           <a:prstGeom prst="rect">
             <a:avLst/>
@@ -28205,8 +28278,30 @@
               </a:defRPr>
             </a:pPr>
             <a:r>
-              <a:t>Demo — Parcours citoyen</a:t>
-            </a:r>
+              <a:rPr dirty="0"/>
+              <a:t>Demo </a:t>
+            </a:r>
+            <a:r>
+              <a:rPr lang="fr-FR" dirty="0"/>
+              <a:t>-</a:t>
+            </a:r>
+            <a:r>
+              <a:rPr dirty="0"/>
+              <a:t> </a:t>
+            </a:r>
+            <a:r>
+              <a:rPr dirty="0" err="1"/>
+              <a:t>Parcours</a:t>
+            </a:r>
+            <a:r>
+              <a:rPr dirty="0"/>
+              <a:t> </a:t>
+            </a:r>
+            <a:r>
+              <a:rPr dirty="0" err="1"/>
+              <a:t>citoyen</a:t>
+            </a:r>
+            <a:endParaRPr dirty="0"/>
           </a:p>
         </p:txBody>
       </p:sp>
@@ -28248,48 +28343,6 @@
             </a:pPr>
             <a:r>
               <a:t>Front-office public</a:t>
-            </a:r>
-          </a:p>
-        </p:txBody>
-      </p:sp>
-      <p:sp>
-        <p:nvSpPr>
-          <p:cNvPr id="6" name="TextBox 5"/>
-          <p:cNvSpPr txBox="1"/>
-          <p:nvPr/>
-        </p:nvSpPr>
-        <p:spPr>
-          <a:xfrm>
-            <a:off x="10180015" y="320040"/>
-            <a:ext cx="1645920" cy="365760"/>
-          </a:xfrm>
-          <a:prstGeom prst="rect">
-            <a:avLst/>
-          </a:prstGeom>
-          <a:noFill/>
-        </p:spPr>
-        <p:txBody>
-          <a:bodyPr wrap="square">
-            <a:spAutoFit/>
-          </a:bodyPr>
-          <a:lstStyle/>
-          <a:p>
-            <a:pPr algn="r">
-              <a:lnSpc>
-                <a:spcPts val="1320"/>
-              </a:lnSpc>
-              <a:spcAft>
-                <a:spcPts val="400"/>
-              </a:spcAft>
-              <a:defRPr sz="1100" b="0" i="1">
-                <a:solidFill>
-                  <a:srgbClr val="AABBDD"/>
-                </a:solidFill>
-                <a:latin typeface="Calibri"/>
-              </a:defRPr>
-            </a:pPr>
-            <a:r>
-              <a:t>3 min</a:t>
             </a:r>
           </a:p>
         </p:txBody>
@@ -28333,7 +28386,7 @@
           </a:fontRef>
         </p:style>
         <p:txBody>
-          <a:bodyPr rtlCol="0" anchor="ctr" wrap="square"/>
+          <a:bodyPr wrap="square" rtlCol="0" anchor="ctr"/>
           <a:lstStyle/>
           <a:p>
             <a:pPr algn="ctr">
@@ -28653,7 +28706,7 @@
 </file>
 
 <file path=ppt/slides/slide9.xml><?xml version="1.0" encoding="utf-8"?>
-<p:sld xmlns:a="http://schemas.openxmlformats.org/drawingml/2006/main" xmlns:p="http://schemas.openxmlformats.org/presentationml/2006/main" xmlns:r="http://schemas.openxmlformats.org/officeDocument/2006/relationships">
+<p:sld xmlns:a="http://schemas.openxmlformats.org/drawingml/2006/main" xmlns:r="http://schemas.openxmlformats.org/officeDocument/2006/relationships" xmlns:p="http://schemas.openxmlformats.org/presentationml/2006/main">
   <p:cSld>
     <p:bg>
       <p:bgPr>
@@ -28669,7 +28722,14 @@
         <p:cNvGrpSpPr/>
         <p:nvPr/>
       </p:nvGrpSpPr>
-      <p:grpSpPr/>
+      <p:grpSpPr>
+        <a:xfrm>
+          <a:off x="0" y="0"/>
+          <a:ext cx="0" cy="0"/>
+          <a:chOff x="0" y="0"/>
+          <a:chExt cx="0" cy="0"/>
+        </a:xfrm>
+      </p:grpSpPr>
       <p:sp>
         <p:nvSpPr>
           <p:cNvPr id="2" name="Rectangle 1"/>
@@ -28710,6 +28770,7 @@
           <a:lstStyle/>
           <a:p>
             <a:pPr algn="ctr"/>
+            <a:endParaRPr/>
           </a:p>
         </p:txBody>
       </p:sp>
@@ -28845,48 +28906,6 @@
             </a:pPr>
             <a:r>
               <a:t>Back-office et moderation</a:t>
-            </a:r>
-          </a:p>
-        </p:txBody>
-      </p:sp>
-      <p:sp>
-        <p:nvSpPr>
-          <p:cNvPr id="6" name="TextBox 5"/>
-          <p:cNvSpPr txBox="1"/>
-          <p:nvPr/>
-        </p:nvSpPr>
-        <p:spPr>
-          <a:xfrm>
-            <a:off x="10180015" y="320040"/>
-            <a:ext cx="1645920" cy="365760"/>
-          </a:xfrm>
-          <a:prstGeom prst="rect">
-            <a:avLst/>
-          </a:prstGeom>
-          <a:noFill/>
-        </p:spPr>
-        <p:txBody>
-          <a:bodyPr wrap="square">
-            <a:spAutoFit/>
-          </a:bodyPr>
-          <a:lstStyle/>
-          <a:p>
-            <a:pPr algn="r">
-              <a:lnSpc>
-                <a:spcPts val="1320"/>
-              </a:lnSpc>
-              <a:spcAft>
-                <a:spcPts val="400"/>
-              </a:spcAft>
-              <a:defRPr sz="1100" b="0" i="1">
-                <a:solidFill>
-                  <a:srgbClr val="AABBDD"/>
-                </a:solidFill>
-                <a:latin typeface="Calibri"/>
-              </a:defRPr>
-            </a:pPr>
-            <a:r>
-              <a:t>2 min</a:t>
             </a:r>
           </a:p>
         </p:txBody>
@@ -28930,7 +28949,7 @@
           </a:fontRef>
         </p:style>
         <p:txBody>
-          <a:bodyPr rtlCol="0" anchor="ctr" wrap="square"/>
+          <a:bodyPr wrap="square" rtlCol="0" anchor="ctr"/>
           <a:lstStyle/>
           <a:p>
             <a:pPr algn="ctr">
@@ -28954,7 +28973,7 @@
             </a:r>
             <a:br/>
             <a:r>
-              <a:t>http://localhost:3005/administration</a:t>
+              <a:t>http://localhost:3005/admin</a:t>
             </a:r>
           </a:p>
         </p:txBody>
@@ -29010,7 +29029,7 @@
         <p:spPr>
           <a:xfrm>
             <a:off x="8046720" y="1920240"/>
-            <a:ext cx="3657600" cy="3657600"/>
+            <a:ext cx="3657600" cy="2072940"/>
           </a:xfrm>
           <a:prstGeom prst="rect">
             <a:avLst/>
@@ -29038,6 +29057,7 @@
               </a:defRPr>
             </a:pPr>
             <a:r>
+              <a:rPr dirty="0"/>
               <a:t>1. Dashboard stats (barres + donut)</a:t>
             </a:r>
           </a:p>
@@ -29057,7 +29077,36 @@
               </a:defRPr>
             </a:pPr>
             <a:r>
-              <a:t>2. Metriques cles (users, actifs...)</a:t>
+              <a:rPr dirty="0"/>
+              <a:t>2. M</a:t>
+            </a:r>
+            <a:r>
+              <a:rPr lang="fr-FR" dirty="0"/>
+              <a:t>é</a:t>
+            </a:r>
+            <a:r>
+              <a:rPr dirty="0" err="1"/>
+              <a:t>triques</a:t>
+            </a:r>
+            <a:r>
+              <a:rPr dirty="0"/>
+              <a:t> cl</a:t>
+            </a:r>
+            <a:r>
+              <a:rPr lang="fr-FR" dirty="0"/>
+              <a:t>é</a:t>
+            </a:r>
+            <a:r>
+              <a:rPr dirty="0"/>
+              <a:t>s (users, </a:t>
+            </a:r>
+            <a:r>
+              <a:rPr dirty="0" err="1"/>
+              <a:t>actifs</a:t>
+            </a:r>
+            <a:r>
+              <a:rPr dirty="0"/>
+              <a:t>...)</a:t>
             </a:r>
           </a:p>
           <a:p>
@@ -29076,8 +29125,22 @@
               </a:defRPr>
             </a:pPr>
             <a:r>
-              <a:t>3. Moderation : approuver ressource</a:t>
-            </a:r>
+              <a:rPr dirty="0"/>
+              <a:t>3. Moderation : </a:t>
+            </a:r>
+            <a:r>
+              <a:rPr dirty="0" err="1"/>
+              <a:t>approuver</a:t>
+            </a:r>
+            <a:r>
+              <a:rPr dirty="0"/>
+              <a:t> </a:t>
+            </a:r>
+            <a:r>
+              <a:rPr dirty="0" err="1"/>
+              <a:t>ressource</a:t>
+            </a:r>
+            <a:endParaRPr dirty="0"/>
           </a:p>
           <a:p>
             <a:pPr>
@@ -29095,8 +29158,26 @@
               </a:defRPr>
             </a:pPr>
             <a:r>
-              <a:t>4. Moderation : gerer commentaires</a:t>
-            </a:r>
+              <a:rPr dirty="0"/>
+              <a:t>4. Moderation : g</a:t>
+            </a:r>
+            <a:r>
+              <a:rPr lang="fr-FR" dirty="0"/>
+              <a:t>é</a:t>
+            </a:r>
+            <a:r>
+              <a:rPr dirty="0" err="1"/>
+              <a:t>rer</a:t>
+            </a:r>
+            <a:r>
+              <a:rPr dirty="0"/>
+              <a:t> </a:t>
+            </a:r>
+            <a:r>
+              <a:rPr dirty="0" err="1"/>
+              <a:t>commentaires</a:t>
+            </a:r>
+            <a:endParaRPr dirty="0"/>
           </a:p>
           <a:p>
             <a:pPr>
@@ -29114,7 +29195,16 @@
               </a:defRPr>
             </a:pPr>
             <a:r>
-              <a:t>5. Gestion utilisateurs (CRUD)</a:t>
+              <a:rPr dirty="0"/>
+              <a:t>5. Gestion </a:t>
+            </a:r>
+            <a:r>
+              <a:rPr dirty="0" err="1"/>
+              <a:t>utilisateurs</a:t>
+            </a:r>
+            <a:r>
+              <a:rPr dirty="0"/>
+              <a:t> (CRUD)</a:t>
             </a:r>
           </a:p>
           <a:p>
@@ -29133,6 +29223,7 @@
               </a:defRPr>
             </a:pPr>
             <a:r>
+              <a:rPr dirty="0"/>
               <a:t>6. Gestion categories</a:t>
             </a:r>
           </a:p>
@@ -29178,6 +29269,7 @@
           <a:lstStyle/>
           <a:p>
             <a:pPr algn="ctr"/>
+            <a:endParaRPr/>
           </a:p>
         </p:txBody>
       </p:sp>
